--- a/6_8Network Communication_Multiple Access Control (MAC) Protocols.pptx
+++ b/6_8Network Communication_Multiple Access Control (MAC) Protocols.pptx
@@ -266,7 +266,7 @@
           <a:p>
             <a:fld id="{A5AA3E45-57A9-44A4-8D02-ECC452318D6C}" type="datetimeFigureOut">
               <a:rPr lang="en-US" smtClean="0"/>
-              <a:t>2/26/2025</a:t>
+              <a:t>5/5/2025</a:t>
             </a:fld>
             <a:endParaRPr lang="en-US"/>
           </a:p>
@@ -711,7 +711,7 @@
         <p:nvSpPr>
           <p:cNvPr id="25602" name="Rectangle 2"/>
           <p:cNvSpPr>
-            <a:spLocks noRot="1" noChangeArrowheads="1" noTextEdit="1"/>
+            <a:spLocks noGrp="1" noRot="1" noChangeAspect="1" noChangeArrowheads="1" noTextEdit="1"/>
           </p:cNvSpPr>
           <p:nvPr>
             <p:ph type="sldImg"/>
@@ -953,7 +953,7 @@
         <p:nvSpPr>
           <p:cNvPr id="28674" name="Rectangle 2"/>
           <p:cNvSpPr>
-            <a:spLocks noRot="1" noChangeArrowheads="1" noTextEdit="1"/>
+            <a:spLocks noGrp="1" noRot="1" noChangeAspect="1" noChangeArrowheads="1" noTextEdit="1"/>
           </p:cNvSpPr>
           <p:nvPr>
             <p:ph type="sldImg"/>
@@ -1195,7 +1195,7 @@
         <p:nvSpPr>
           <p:cNvPr id="34818" name="Rectangle 2"/>
           <p:cNvSpPr>
-            <a:spLocks noRot="1" noChangeArrowheads="1" noTextEdit="1"/>
+            <a:spLocks noGrp="1" noRot="1" noChangeAspect="1" noChangeArrowheads="1" noTextEdit="1"/>
           </p:cNvSpPr>
           <p:nvPr>
             <p:ph type="sldImg"/>
@@ -1437,7 +1437,7 @@
         <p:nvSpPr>
           <p:cNvPr id="56322" name="Rectangle 2"/>
           <p:cNvSpPr>
-            <a:spLocks noRot="1" noChangeArrowheads="1" noTextEdit="1"/>
+            <a:spLocks noGrp="1" noRot="1" noChangeAspect="1" noChangeArrowheads="1" noTextEdit="1"/>
           </p:cNvSpPr>
           <p:nvPr>
             <p:ph type="sldImg"/>
@@ -1679,7 +1679,7 @@
         <p:nvSpPr>
           <p:cNvPr id="59394" name="Rectangle 2"/>
           <p:cNvSpPr>
-            <a:spLocks noRot="1" noChangeArrowheads="1" noTextEdit="1"/>
+            <a:spLocks noGrp="1" noRot="1" noChangeAspect="1" noChangeArrowheads="1" noTextEdit="1"/>
           </p:cNvSpPr>
           <p:nvPr>
             <p:ph type="sldImg"/>
@@ -1921,7 +1921,7 @@
         <p:nvSpPr>
           <p:cNvPr id="61442" name="Rectangle 2"/>
           <p:cNvSpPr>
-            <a:spLocks noRot="1" noChangeArrowheads="1" noTextEdit="1"/>
+            <a:spLocks noGrp="1" noRot="1" noChangeAspect="1" noChangeArrowheads="1" noTextEdit="1"/>
           </p:cNvSpPr>
           <p:nvPr>
             <p:ph type="sldImg"/>
@@ -2163,7 +2163,7 @@
         <p:nvSpPr>
           <p:cNvPr id="64514" name="Rectangle 2"/>
           <p:cNvSpPr>
-            <a:spLocks noRot="1" noChangeArrowheads="1" noTextEdit="1"/>
+            <a:spLocks noGrp="1" noRot="1" noChangeAspect="1" noChangeArrowheads="1" noTextEdit="1"/>
           </p:cNvSpPr>
           <p:nvPr>
             <p:ph type="sldImg"/>
@@ -2359,7 +2359,7 @@
           <a:p>
             <a:fld id="{6F28CD25-4015-481E-94C9-A931395C8E35}" type="datetimeFigureOut">
               <a:rPr lang="en-US" smtClean="0"/>
-              <a:t>2/26/2025</a:t>
+              <a:t>5/5/2025</a:t>
             </a:fld>
             <a:endParaRPr lang="en-US"/>
           </a:p>
@@ -2529,7 +2529,7 @@
           <a:p>
             <a:fld id="{6F28CD25-4015-481E-94C9-A931395C8E35}" type="datetimeFigureOut">
               <a:rPr lang="en-US" smtClean="0"/>
-              <a:t>2/26/2025</a:t>
+              <a:t>5/5/2025</a:t>
             </a:fld>
             <a:endParaRPr lang="en-US"/>
           </a:p>
@@ -2709,7 +2709,7 @@
           <a:p>
             <a:fld id="{6F28CD25-4015-481E-94C9-A931395C8E35}" type="datetimeFigureOut">
               <a:rPr lang="en-US" smtClean="0"/>
-              <a:t>2/26/2025</a:t>
+              <a:t>5/5/2025</a:t>
             </a:fld>
             <a:endParaRPr lang="en-US"/>
           </a:p>
@@ -2879,7 +2879,7 @@
           <a:p>
             <a:fld id="{6F28CD25-4015-481E-94C9-A931395C8E35}" type="datetimeFigureOut">
               <a:rPr lang="en-US" smtClean="0"/>
-              <a:t>2/26/2025</a:t>
+              <a:t>5/5/2025</a:t>
             </a:fld>
             <a:endParaRPr lang="en-US"/>
           </a:p>
@@ -3125,7 +3125,7 @@
           <a:p>
             <a:fld id="{6F28CD25-4015-481E-94C9-A931395C8E35}" type="datetimeFigureOut">
               <a:rPr lang="en-US" smtClean="0"/>
-              <a:t>2/26/2025</a:t>
+              <a:t>5/5/2025</a:t>
             </a:fld>
             <a:endParaRPr lang="en-US"/>
           </a:p>
@@ -3357,7 +3357,7 @@
           <a:p>
             <a:fld id="{6F28CD25-4015-481E-94C9-A931395C8E35}" type="datetimeFigureOut">
               <a:rPr lang="en-US" smtClean="0"/>
-              <a:t>2/26/2025</a:t>
+              <a:t>5/5/2025</a:t>
             </a:fld>
             <a:endParaRPr lang="en-US"/>
           </a:p>
@@ -3724,7 +3724,7 @@
           <a:p>
             <a:fld id="{6F28CD25-4015-481E-94C9-A931395C8E35}" type="datetimeFigureOut">
               <a:rPr lang="en-US" smtClean="0"/>
-              <a:t>2/26/2025</a:t>
+              <a:t>5/5/2025</a:t>
             </a:fld>
             <a:endParaRPr lang="en-US"/>
           </a:p>
@@ -3842,7 +3842,7 @@
           <a:p>
             <a:fld id="{6F28CD25-4015-481E-94C9-A931395C8E35}" type="datetimeFigureOut">
               <a:rPr lang="en-US" smtClean="0"/>
-              <a:t>2/26/2025</a:t>
+              <a:t>5/5/2025</a:t>
             </a:fld>
             <a:endParaRPr lang="en-US"/>
           </a:p>
@@ -3937,7 +3937,7 @@
           <a:p>
             <a:fld id="{6F28CD25-4015-481E-94C9-A931395C8E35}" type="datetimeFigureOut">
               <a:rPr lang="en-US" smtClean="0"/>
-              <a:t>2/26/2025</a:t>
+              <a:t>5/5/2025</a:t>
             </a:fld>
             <a:endParaRPr lang="en-US"/>
           </a:p>
@@ -4214,7 +4214,7 @@
           <a:p>
             <a:fld id="{6F28CD25-4015-481E-94C9-A931395C8E35}" type="datetimeFigureOut">
               <a:rPr lang="en-US" smtClean="0"/>
-              <a:t>2/26/2025</a:t>
+              <a:t>5/5/2025</a:t>
             </a:fld>
             <a:endParaRPr lang="en-US"/>
           </a:p>
@@ -4471,7 +4471,7 @@
           <a:p>
             <a:fld id="{6F28CD25-4015-481E-94C9-A931395C8E35}" type="datetimeFigureOut">
               <a:rPr lang="en-US" smtClean="0"/>
-              <a:t>2/26/2025</a:t>
+              <a:t>5/5/2025</a:t>
             </a:fld>
             <a:endParaRPr lang="en-US"/>
           </a:p>
@@ -4684,7 +4684,7 @@
           <a:p>
             <a:fld id="{6F28CD25-4015-481E-94C9-A931395C8E35}" type="datetimeFigureOut">
               <a:rPr lang="en-US" smtClean="0"/>
-              <a:t>2/26/2025</a:t>
+              <a:t>5/5/2025</a:t>
             </a:fld>
             <a:endParaRPr lang="en-US"/>
           </a:p>
@@ -7214,7 +7214,7 @@
         </p:nvSpPr>
         <p:spPr>
           <a:xfrm>
-            <a:off x="2133601" y="152400"/>
+            <a:off x="477330" y="0"/>
             <a:ext cx="6348413" cy="1320800"/>
           </a:xfrm>
         </p:spPr>
@@ -7224,7 +7224,7 @@
           <a:p>
             <a:pPr eaLnBrk="1" hangingPunct="1"/>
             <a:r>
-              <a:rPr lang="en-US" altLang="en-US" smtClean="0"/>
+              <a:rPr lang="en-US" altLang="en-US" dirty="0" smtClean="0"/>
               <a:t>1 Pure ALOHA</a:t>
             </a:r>
           </a:p>
@@ -7242,13 +7242,13 @@
         </p:nvSpPr>
         <p:spPr>
           <a:xfrm>
-            <a:off x="1524000" y="812800"/>
-            <a:ext cx="7848600" cy="5511800"/>
+            <a:off x="672860" y="812800"/>
+            <a:ext cx="11128076" cy="5511800"/>
           </a:xfrm>
         </p:spPr>
         <p:txBody>
           <a:bodyPr>
-            <a:normAutofit fontScale="85000" lnSpcReduction="20000"/>
+            <a:normAutofit lnSpcReduction="10000"/>
           </a:bodyPr>
           <a:lstStyle/>
           <a:p>
@@ -7258,7 +7258,7 @@
               </a:lnSpc>
             </a:pPr>
             <a:r>
-              <a:rPr lang="en-US" altLang="en-US" smtClean="0"/>
+              <a:rPr lang="en-US" altLang="en-US" dirty="0" smtClean="0"/>
               <a:t>All frames from any station are of fixed length (L bits) </a:t>
             </a:r>
           </a:p>
@@ -7269,7 +7269,7 @@
               </a:lnSpc>
             </a:pPr>
             <a:r>
-              <a:rPr lang="en-US" altLang="en-US" smtClean="0"/>
+              <a:rPr lang="en-US" altLang="en-US" dirty="0" smtClean="0"/>
               <a:t>Stations transmit at equal transmission time (all stations produce frames with equal frame lengths).</a:t>
             </a:r>
           </a:p>
@@ -7280,7 +7280,7 @@
               </a:lnSpc>
             </a:pPr>
             <a:r>
-              <a:rPr lang="en-US" altLang="en-US" smtClean="0"/>
+              <a:rPr lang="en-US" altLang="en-US" dirty="0" smtClean="0"/>
               <a:t>A station that has data can transmit at any time</a:t>
             </a:r>
           </a:p>
@@ -7291,15 +7291,15 @@
               </a:lnSpc>
             </a:pPr>
             <a:r>
-              <a:rPr lang="en-US" altLang="en-US" smtClean="0"/>
+              <a:rPr lang="en-US" altLang="en-US" dirty="0" smtClean="0"/>
               <a:t>After transmitting a frame, the sender waits for an acknowledgment for an amount of time (</a:t>
             </a:r>
             <a:r>
-              <a:rPr lang="en-US" altLang="en-US" b="1" smtClean="0"/>
+              <a:rPr lang="en-US" altLang="en-US" b="1" dirty="0" smtClean="0"/>
               <a:t>time out</a:t>
             </a:r>
             <a:r>
-              <a:rPr lang="en-US" altLang="en-US" smtClean="0"/>
+              <a:rPr lang="en-US" altLang="en-US" dirty="0" smtClean="0"/>
               <a:t>) equal to the maximum round-trip propagation delay  </a:t>
             </a:r>
           </a:p>
@@ -7310,15 +7310,19 @@
               </a:lnSpc>
             </a:pPr>
             <a:r>
-              <a:rPr lang="en-US" altLang="en-US" smtClean="0"/>
-              <a:t>Time out= 2* t</a:t>
-            </a:r>
-            <a:r>
-              <a:rPr lang="en-US" altLang="en-US" baseline="-25000" smtClean="0"/>
+              <a:rPr lang="en-US" altLang="en-US" dirty="0" smtClean="0"/>
+              <a:t>Time out= 2* </a:t>
+            </a:r>
+            <a:r>
+              <a:rPr lang="en-US" altLang="en-US" dirty="0" err="1" smtClean="0"/>
+              <a:t>t</a:t>
+            </a:r>
+            <a:r>
+              <a:rPr lang="en-US" altLang="en-US" baseline="-25000" dirty="0" err="1" smtClean="0"/>
               <a:t>prop</a:t>
             </a:r>
             <a:r>
-              <a:rPr lang="en-US" altLang="en-US" smtClean="0"/>
+              <a:rPr lang="en-US" altLang="en-US" dirty="0" smtClean="0"/>
               <a:t> </a:t>
             </a:r>
           </a:p>
@@ -7329,7 +7333,7 @@
               </a:lnSpc>
             </a:pPr>
             <a:r>
-              <a:rPr lang="en-US" altLang="en-US" smtClean="0"/>
+              <a:rPr lang="en-US" altLang="en-US" dirty="0" smtClean="0"/>
               <a:t>If  no ACK was received, sender assumes that the frame or ACK has been destroyed  and resends that frame after it waits for a random amount of time</a:t>
             </a:r>
           </a:p>
@@ -7340,7 +7344,7 @@
               </a:lnSpc>
             </a:pPr>
             <a:r>
-              <a:rPr lang="en-US" altLang="en-US" smtClean="0"/>
+              <a:rPr lang="en-US" altLang="en-US" dirty="0" smtClean="0"/>
               <a:t>If station fails to receive an ACK after repeated transmissions, it gives up.</a:t>
             </a:r>
           </a:p>
@@ -7351,7 +7355,7 @@
               </a:lnSpc>
             </a:pPr>
             <a:r>
-              <a:rPr lang="en-US" altLang="en-US" smtClean="0"/>
+              <a:rPr lang="en-US" altLang="en-US" dirty="0" smtClean="0"/>
               <a:t>Channel utilization or efficiency or Throughput is the percentage of the transmitted frames that arrive successfully (without collisions)</a:t>
             </a:r>
           </a:p>
@@ -7361,7 +7365,7 @@
                 <a:spcPct val="120000"/>
               </a:lnSpc>
             </a:pPr>
-            <a:endParaRPr lang="en-US" altLang="en-US" sz="1600"/>
+            <a:endParaRPr lang="en-US" altLang="en-US" sz="1600" dirty="0"/>
           </a:p>
         </p:txBody>
       </p:sp>
@@ -7375,6 +7379,13 @@
   <p:clrMapOvr>
     <a:masterClrMapping/>
   </p:clrMapOvr>
+  <p:timing>
+    <p:tnLst>
+      <p:par>
+        <p:cTn id="1" dur="indefinite" restart="never" nodeType="tmRoot"/>
+      </p:par>
+    </p:tnLst>
+  </p:timing>
 </p:sld>
 </file>
 
@@ -8614,88 +8625,6 @@
       </p:grpSpPr>
       <p:sp>
         <p:nvSpPr>
-          <p:cNvPr id="33793" name="Line 2"/>
-          <p:cNvSpPr>
-            <a:spLocks noChangeShapeType="1"/>
-          </p:cNvSpPr>
-          <p:nvPr/>
-        </p:nvSpPr>
-        <p:spPr bwMode="auto">
-          <a:xfrm>
-            <a:off x="1676400" y="152400"/>
-            <a:ext cx="8763000" cy="0"/>
-          </a:xfrm>
-          <a:prstGeom prst="line">
-            <a:avLst/>
-          </a:prstGeom>
-          <a:noFill/>
-          <a:ln w="76200">
-            <a:solidFill>
-              <a:schemeClr val="hlink"/>
-            </a:solidFill>
-            <a:round/>
-            <a:headEnd/>
-            <a:tailEnd/>
-          </a:ln>
-          <a:extLst>
-            <a:ext uri="{909E8E84-426E-40DD-AFC4-6F175D3DCCD1}">
-              <a14:hiddenFill xmlns:a14="http://schemas.microsoft.com/office/drawing/2010/main">
-                <a:noFill/>
-              </a14:hiddenFill>
-            </a:ext>
-          </a:extLst>
-        </p:spPr>
-        <p:txBody>
-          <a:bodyPr/>
-          <a:lstStyle/>
-          <a:p>
-            <a:endParaRPr lang="en-US"/>
-          </a:p>
-        </p:txBody>
-      </p:sp>
-      <p:sp>
-        <p:nvSpPr>
-          <p:cNvPr id="33794" name="Line 3"/>
-          <p:cNvSpPr>
-            <a:spLocks noChangeShapeType="1"/>
-          </p:cNvSpPr>
-          <p:nvPr/>
-        </p:nvSpPr>
-        <p:spPr bwMode="auto">
-          <a:xfrm>
-            <a:off x="1676400" y="990600"/>
-            <a:ext cx="8763000" cy="0"/>
-          </a:xfrm>
-          <a:prstGeom prst="line">
-            <a:avLst/>
-          </a:prstGeom>
-          <a:noFill/>
-          <a:ln w="19050">
-            <a:solidFill>
-              <a:schemeClr val="hlink"/>
-            </a:solidFill>
-            <a:round/>
-            <a:headEnd/>
-            <a:tailEnd/>
-          </a:ln>
-          <a:extLst>
-            <a:ext uri="{909E8E84-426E-40DD-AFC4-6F175D3DCCD1}">
-              <a14:hiddenFill xmlns:a14="http://schemas.microsoft.com/office/drawing/2010/main">
-                <a:noFill/>
-              </a14:hiddenFill>
-            </a:ext>
-          </a:extLst>
-        </p:spPr>
-        <p:txBody>
-          <a:bodyPr/>
-          <a:lstStyle/>
-          <a:p>
-            <a:endParaRPr lang="en-US"/>
-          </a:p>
-        </p:txBody>
-      </p:sp>
-      <p:sp>
-        <p:nvSpPr>
           <p:cNvPr id="33795" name="Text Box 4">
             <a:extLst>
               <a:ext uri="{FF2B5EF4-FFF2-40B4-BE49-F238E27FC236}">
@@ -8931,47 +8860,6 @@
               </a:rPr>
               <a:t>Critical  time for pure ALOHA protocol</a:t>
             </a:r>
-          </a:p>
-        </p:txBody>
-      </p:sp>
-      <p:sp>
-        <p:nvSpPr>
-          <p:cNvPr id="33796" name="Line 5"/>
-          <p:cNvSpPr>
-            <a:spLocks noChangeShapeType="1"/>
-          </p:cNvSpPr>
-          <p:nvPr/>
-        </p:nvSpPr>
-        <p:spPr bwMode="auto">
-          <a:xfrm>
-            <a:off x="1676400" y="6248400"/>
-            <a:ext cx="8763000" cy="0"/>
-          </a:xfrm>
-          <a:prstGeom prst="line">
-            <a:avLst/>
-          </a:prstGeom>
-          <a:noFill/>
-          <a:ln w="76200">
-            <a:solidFill>
-              <a:schemeClr val="hlink"/>
-            </a:solidFill>
-            <a:round/>
-            <a:headEnd/>
-            <a:tailEnd/>
-          </a:ln>
-          <a:extLst>
-            <a:ext uri="{909E8E84-426E-40DD-AFC4-6F175D3DCCD1}">
-              <a14:hiddenFill xmlns:a14="http://schemas.microsoft.com/office/drawing/2010/main">
-                <a:noFill/>
-              </a14:hiddenFill>
-            </a:ext>
-          </a:extLst>
-        </p:spPr>
-        <p:txBody>
-          <a:bodyPr/>
-          <a:lstStyle/>
-          <a:p>
-            <a:endParaRPr lang="en-US"/>
           </a:p>
         </p:txBody>
       </p:sp>
@@ -9045,8 +8933,8 @@
         </p:nvSpPr>
         <p:spPr bwMode="auto">
           <a:xfrm>
-            <a:off x="1828800" y="3962401"/>
-            <a:ext cx="7010400" cy="2092881"/>
+            <a:off x="900332" y="3962401"/>
+            <a:ext cx="10733650" cy="1477328"/>
           </a:xfrm>
           <a:prstGeom prst="rect">
             <a:avLst/>
@@ -9076,7 +8964,7 @@
           </a:extLst>
         </p:spPr>
         <p:txBody>
-          <a:bodyPr>
+          <a:bodyPr wrap="square">
             <a:spAutoFit/>
           </a:bodyPr>
           <a:lstStyle>
@@ -10179,7 +10067,7 @@
         </p:nvSpPr>
         <p:spPr>
           <a:xfrm>
-            <a:off x="1828800" y="304800"/>
+            <a:off x="717452" y="294409"/>
             <a:ext cx="7772400" cy="685800"/>
           </a:xfrm>
         </p:spPr>
@@ -10191,7 +10079,7 @@
           <a:p>
             <a:pPr eaLnBrk="1" hangingPunct="1"/>
             <a:r>
-              <a:rPr lang="en-US" altLang="en-US" smtClean="0"/>
+              <a:rPr lang="en-US" altLang="en-US" dirty="0" smtClean="0"/>
               <a:t>2 Slotted ALOHA</a:t>
             </a:r>
           </a:p>
@@ -10209,8 +10097,8 @@
         </p:nvSpPr>
         <p:spPr>
           <a:xfrm>
-            <a:off x="1857375" y="1219200"/>
-            <a:ext cx="7772400" cy="5181600"/>
+            <a:off x="717452" y="1219200"/>
+            <a:ext cx="10958733" cy="5181600"/>
           </a:xfrm>
         </p:spPr>
         <p:txBody>
@@ -10219,28 +10107,36 @@
           <a:p>
             <a:pPr eaLnBrk="1" hangingPunct="1"/>
             <a:r>
-              <a:rPr lang="en-US" altLang="en-US" smtClean="0"/>
-              <a:t>Time is divided into slots equal to a frame transmission time (Tfr)</a:t>
+              <a:rPr lang="en-US" altLang="en-US" dirty="0" smtClean="0"/>
+              <a:t>Time is divided into slots equal to a frame transmission time (</a:t>
+            </a:r>
+            <a:r>
+              <a:rPr lang="en-US" altLang="en-US" dirty="0" err="1" smtClean="0"/>
+              <a:t>Tfr</a:t>
+            </a:r>
+            <a:r>
+              <a:rPr lang="en-US" altLang="en-US" dirty="0" smtClean="0"/>
+              <a:t>)</a:t>
             </a:r>
           </a:p>
           <a:p>
             <a:pPr eaLnBrk="1" hangingPunct="1"/>
             <a:r>
-              <a:rPr lang="en-US" altLang="en-US" smtClean="0"/>
+              <a:rPr lang="en-US" altLang="en-US" dirty="0" smtClean="0"/>
               <a:t>A station can transmit at the beginning of a slot only.</a:t>
             </a:r>
           </a:p>
           <a:p>
             <a:pPr eaLnBrk="1" hangingPunct="1"/>
             <a:r>
-              <a:rPr lang="en-US" altLang="en-US" smtClean="0"/>
+              <a:rPr lang="en-US" altLang="en-US" dirty="0" smtClean="0"/>
               <a:t>If a station misses the beginning of a slot, it has to wait until the beginning of the next time slot.</a:t>
             </a:r>
           </a:p>
           <a:p>
             <a:pPr eaLnBrk="1" hangingPunct="1"/>
             <a:r>
-              <a:rPr lang="en-US" altLang="en-US" smtClean="0"/>
+              <a:rPr lang="en-US" altLang="en-US" dirty="0" smtClean="0"/>
               <a:t>A central clock or station informs all stations about the start of a each slot</a:t>
             </a:r>
           </a:p>
@@ -10249,18 +10145,18 @@
               <a:buFont typeface="Wingdings" panose="05000000000000000000" pitchFamily="2" charset="2"/>
               <a:buNone/>
             </a:pPr>
-            <a:endParaRPr lang="en-US" altLang="en-US" smtClean="0"/>
+            <a:endParaRPr lang="en-US" altLang="en-US" dirty="0" smtClean="0"/>
           </a:p>
           <a:p>
             <a:pPr lvl="1" eaLnBrk="1" hangingPunct="1"/>
-            <a:endParaRPr lang="en-US" altLang="en-US" smtClean="0"/>
+            <a:endParaRPr lang="en-US" altLang="en-US" dirty="0" smtClean="0"/>
           </a:p>
           <a:p>
             <a:pPr lvl="1" eaLnBrk="1" hangingPunct="1">
               <a:buFont typeface="Wingdings" panose="05000000000000000000" pitchFamily="2" charset="2"/>
               <a:buNone/>
             </a:pPr>
-            <a:endParaRPr lang="en-US" altLang="en-US" smtClean="0"/>
+            <a:endParaRPr lang="en-US" altLang="en-US" dirty="0" smtClean="0"/>
           </a:p>
         </p:txBody>
       </p:sp>
@@ -10274,6 +10170,13 @@
   <p:clrMapOvr>
     <a:masterClrMapping/>
   </p:clrMapOvr>
+  <p:timing>
+    <p:tnLst>
+      <p:par>
+        <p:cTn id="1" dur="indefinite" restart="never" nodeType="tmRoot"/>
+      </p:par>
+    </p:tnLst>
+  </p:timing>
 </p:sld>
 </file>
 
@@ -10294,88 +10197,6 @@
           <a:chExt cx="0" cy="0"/>
         </a:xfrm>
       </p:grpSpPr>
-      <p:sp>
-        <p:nvSpPr>
-          <p:cNvPr id="37889" name="Line 4"/>
-          <p:cNvSpPr>
-            <a:spLocks noChangeShapeType="1"/>
-          </p:cNvSpPr>
-          <p:nvPr/>
-        </p:nvSpPr>
-        <p:spPr bwMode="auto">
-          <a:xfrm>
-            <a:off x="1676400" y="152400"/>
-            <a:ext cx="8763000" cy="0"/>
-          </a:xfrm>
-          <a:prstGeom prst="line">
-            <a:avLst/>
-          </a:prstGeom>
-          <a:noFill/>
-          <a:ln w="76200">
-            <a:solidFill>
-              <a:schemeClr val="hlink"/>
-            </a:solidFill>
-            <a:round/>
-            <a:headEnd/>
-            <a:tailEnd/>
-          </a:ln>
-          <a:extLst>
-            <a:ext uri="{909E8E84-426E-40DD-AFC4-6F175D3DCCD1}">
-              <a14:hiddenFill xmlns:a14="http://schemas.microsoft.com/office/drawing/2010/main">
-                <a:noFill/>
-              </a14:hiddenFill>
-            </a:ext>
-          </a:extLst>
-        </p:spPr>
-        <p:txBody>
-          <a:bodyPr/>
-          <a:lstStyle/>
-          <a:p>
-            <a:endParaRPr lang="en-US"/>
-          </a:p>
-        </p:txBody>
-      </p:sp>
-      <p:sp>
-        <p:nvSpPr>
-          <p:cNvPr id="37890" name="Line 5"/>
-          <p:cNvSpPr>
-            <a:spLocks noChangeShapeType="1"/>
-          </p:cNvSpPr>
-          <p:nvPr/>
-        </p:nvSpPr>
-        <p:spPr bwMode="auto">
-          <a:xfrm>
-            <a:off x="1676400" y="990600"/>
-            <a:ext cx="8763000" cy="0"/>
-          </a:xfrm>
-          <a:prstGeom prst="line">
-            <a:avLst/>
-          </a:prstGeom>
-          <a:noFill/>
-          <a:ln w="19050">
-            <a:solidFill>
-              <a:schemeClr val="hlink"/>
-            </a:solidFill>
-            <a:round/>
-            <a:headEnd/>
-            <a:tailEnd/>
-          </a:ln>
-          <a:extLst>
-            <a:ext uri="{909E8E84-426E-40DD-AFC4-6F175D3DCCD1}">
-              <a14:hiddenFill xmlns:a14="http://schemas.microsoft.com/office/drawing/2010/main">
-                <a:noFill/>
-              </a14:hiddenFill>
-            </a:ext>
-          </a:extLst>
-        </p:spPr>
-        <p:txBody>
-          <a:bodyPr/>
-          <a:lstStyle/>
-          <a:p>
-            <a:endParaRPr lang="en-US"/>
-          </a:p>
-        </p:txBody>
-      </p:sp>
       <p:sp>
         <p:nvSpPr>
           <p:cNvPr id="37891" name="Text Box 6">
@@ -10613,47 +10434,6 @@
               </a:rPr>
               <a:t>In danger time for slotted ALOHA protocol</a:t>
             </a:r>
-          </a:p>
-        </p:txBody>
-      </p:sp>
-      <p:sp>
-        <p:nvSpPr>
-          <p:cNvPr id="37892" name="Line 7"/>
-          <p:cNvSpPr>
-            <a:spLocks noChangeShapeType="1"/>
-          </p:cNvSpPr>
-          <p:nvPr/>
-        </p:nvSpPr>
-        <p:spPr bwMode="auto">
-          <a:xfrm>
-            <a:off x="1676400" y="6248400"/>
-            <a:ext cx="8763000" cy="0"/>
-          </a:xfrm>
-          <a:prstGeom prst="line">
-            <a:avLst/>
-          </a:prstGeom>
-          <a:noFill/>
-          <a:ln w="76200">
-            <a:solidFill>
-              <a:schemeClr val="hlink"/>
-            </a:solidFill>
-            <a:round/>
-            <a:headEnd/>
-            <a:tailEnd/>
-          </a:ln>
-          <a:extLst>
-            <a:ext uri="{909E8E84-426E-40DD-AFC4-6F175D3DCCD1}">
-              <a14:hiddenFill xmlns:a14="http://schemas.microsoft.com/office/drawing/2010/main">
-                <a:noFill/>
-              </a14:hiddenFill>
-            </a:ext>
-          </a:extLst>
-        </p:spPr>
-        <p:txBody>
-          <a:bodyPr/>
-          <a:lstStyle/>
-          <a:p>
-            <a:endParaRPr lang="en-US"/>
           </a:p>
         </p:txBody>
       </p:sp>
@@ -11739,6 +11519,13 @@
   <p:clrMapOvr>
     <a:masterClrMapping/>
   </p:clrMapOvr>
+  <p:timing>
+    <p:tnLst>
+      <p:par>
+        <p:cTn id="1" dur="indefinite" restart="never" nodeType="tmRoot"/>
+      </p:par>
+    </p:tnLst>
+  </p:timing>
 </p:sld>
 </file>
 
@@ -11794,13 +11581,13 @@
         </p:nvSpPr>
         <p:spPr>
           <a:xfrm>
-            <a:off x="2133600" y="1504950"/>
-            <a:ext cx="6629400" cy="4362450"/>
+            <a:off x="562708" y="1504950"/>
+            <a:ext cx="11031194" cy="4362450"/>
           </a:xfrm>
         </p:spPr>
         <p:txBody>
           <a:bodyPr>
-            <a:normAutofit fontScale="92500" lnSpcReduction="10000"/>
+            <a:normAutofit/>
           </a:bodyPr>
           <a:lstStyle/>
           <a:p>
@@ -11816,7 +11603,7 @@
               <a:buChar char="n"/>
             </a:pPr>
             <a:r>
-              <a:rPr lang="en-US" altLang="en-US" sz="2400"/>
+              <a:rPr lang="en-US" altLang="en-US" sz="2400" dirty="0"/>
               <a:t>Advantage of ALOHA protocols</a:t>
             </a:r>
           </a:p>
@@ -11833,31 +11620,31 @@
               <a:buChar char="n"/>
             </a:pPr>
             <a:r>
-              <a:rPr lang="en-US" altLang="en-US" smtClean="0"/>
+              <a:rPr lang="en-US" altLang="en-US" dirty="0" smtClean="0"/>
               <a:t>A node that has frames to be transmitted  can </a:t>
             </a:r>
             <a:r>
-              <a:rPr lang="en-US" altLang="en-US" b="1" smtClean="0"/>
+              <a:rPr lang="en-US" altLang="en-US" b="1" dirty="0" smtClean="0"/>
               <a:t>transmit continuously</a:t>
             </a:r>
             <a:r>
-              <a:rPr lang="en-US" altLang="en-US" smtClean="0"/>
+              <a:rPr lang="en-US" altLang="en-US" dirty="0" smtClean="0"/>
               <a:t> at the </a:t>
             </a:r>
             <a:r>
-              <a:rPr lang="en-US" altLang="en-US" b="1" smtClean="0"/>
+              <a:rPr lang="en-US" altLang="en-US" b="1" dirty="0" smtClean="0"/>
               <a:t>full rate of channel (R bps)</a:t>
             </a:r>
             <a:r>
-              <a:rPr lang="en-US" altLang="en-US" smtClean="0"/>
+              <a:rPr lang="en-US" altLang="en-US" dirty="0" smtClean="0"/>
               <a:t> if it is the </a:t>
             </a:r>
             <a:r>
-              <a:rPr lang="en-US" altLang="en-US" u="sng" smtClean="0"/>
+              <a:rPr lang="en-US" altLang="en-US" u="sng" dirty="0" smtClean="0"/>
               <a:t>only node</a:t>
             </a:r>
             <a:r>
-              <a:rPr lang="en-US" altLang="en-US" smtClean="0"/>
+              <a:rPr lang="en-US" altLang="en-US" dirty="0" smtClean="0"/>
               <a:t> with frames</a:t>
             </a:r>
           </a:p>
@@ -11874,7 +11661,7 @@
               <a:buChar char="n"/>
             </a:pPr>
             <a:r>
-              <a:rPr lang="en-US" altLang="en-US" smtClean="0"/>
+              <a:rPr lang="en-US" altLang="en-US" dirty="0" smtClean="0"/>
               <a:t>Simple to be implemented</a:t>
             </a:r>
           </a:p>
@@ -11891,7 +11678,7 @@
               <a:buChar char="n"/>
             </a:pPr>
             <a:r>
-              <a:rPr lang="en-US" altLang="en-US" smtClean="0"/>
+              <a:rPr lang="en-US" altLang="en-US" dirty="0" smtClean="0"/>
               <a:t>No master station is needed to control the medium</a:t>
             </a:r>
           </a:p>
@@ -11908,7 +11695,7 @@
               <a:buChar char="n"/>
             </a:pPr>
             <a:r>
-              <a:rPr lang="en-US" altLang="en-US" sz="2400"/>
+              <a:rPr lang="en-US" altLang="en-US" sz="2400" dirty="0"/>
               <a:t>Disadvantage</a:t>
             </a:r>
           </a:p>
@@ -11925,11 +11712,11 @@
               <a:buChar char="n"/>
             </a:pPr>
             <a:r>
-              <a:rPr lang="en-US" altLang="en-US" smtClean="0"/>
+              <a:rPr lang="en-US" altLang="en-US" dirty="0" smtClean="0"/>
               <a:t>If (M) nodes want to transmit, many collisions can occur and the rate allocated for each node will </a:t>
             </a:r>
             <a:r>
-              <a:rPr lang="en-US" altLang="en-US" b="1" smtClean="0"/>
+              <a:rPr lang="en-US" altLang="en-US" b="1" dirty="0" smtClean="0"/>
               <a:t>not be on average R/M bps </a:t>
             </a:r>
           </a:p>
@@ -11946,13 +11733,13 @@
               <a:buChar char="n"/>
             </a:pPr>
             <a:r>
-              <a:rPr lang="en-US" altLang="en-US" smtClean="0"/>
+              <a:rPr lang="en-US" altLang="en-US" dirty="0" smtClean="0"/>
               <a:t>This causes low channel utilization</a:t>
             </a:r>
           </a:p>
           <a:p>
             <a:pPr eaLnBrk="1" hangingPunct="1"/>
-            <a:endParaRPr lang="en-US" altLang="en-US" smtClean="0"/>
+            <a:endParaRPr lang="en-US" altLang="en-US" dirty="0" smtClean="0"/>
           </a:p>
         </p:txBody>
       </p:sp>
@@ -11966,6 +11753,13 @@
   <p:clrMapOvr>
     <a:masterClrMapping/>
   </p:clrMapOvr>
+  <p:timing>
+    <p:tnLst>
+      <p:par>
+        <p:cTn id="1" dur="indefinite" restart="never" nodeType="tmRoot"/>
+      </p:par>
+    </p:tnLst>
+  </p:timing>
 </p:sld>
 </file>
 
@@ -12442,18 +12236,18 @@
         </p:nvSpPr>
         <p:spPr>
           <a:xfrm>
-            <a:off x="2133600" y="2700338"/>
-            <a:ext cx="7086600" cy="1827212"/>
+            <a:off x="1395414" y="1216595"/>
+            <a:ext cx="9456616" cy="1827212"/>
           </a:xfrm>
         </p:spPr>
         <p:txBody>
           <a:bodyPr>
-            <a:normAutofit fontScale="90000"/>
+            <a:normAutofit/>
           </a:bodyPr>
           <a:lstStyle/>
           <a:p>
             <a:r>
-              <a:rPr lang="en-US" altLang="en-US" smtClean="0"/>
+              <a:rPr lang="en-US" altLang="en-US" dirty="0" smtClean="0"/>
               <a:t>Random Access – Carrier Sense Multiple Access (CSMA)</a:t>
             </a:r>
           </a:p>
@@ -13168,7 +12962,7 @@
         </p:nvSpPr>
         <p:spPr>
           <a:xfrm>
-            <a:off x="1828800" y="152400"/>
+            <a:off x="845389" y="0"/>
             <a:ext cx="6705600" cy="838200"/>
           </a:xfrm>
         </p:spPr>
@@ -13178,7 +12972,7 @@
           <a:p>
             <a:pPr eaLnBrk="1" hangingPunct="1"/>
             <a:r>
-              <a:rPr lang="en-US" altLang="en-US" sz="2400"/>
+              <a:rPr lang="en-US" altLang="en-US" sz="2400" dirty="0"/>
               <a:t>Random Access – Carrier Sense Multiple Access (CSMA)</a:t>
             </a:r>
           </a:p>
@@ -13202,14 +12996,14 @@
         </p:nvSpPr>
         <p:spPr>
           <a:xfrm>
-            <a:off x="1828800" y="990600"/>
-            <a:ext cx="7391400" cy="3962400"/>
+            <a:off x="845389" y="990600"/>
+            <a:ext cx="11197085" cy="3962400"/>
           </a:xfrm>
           <a:extLst/>
         </p:spPr>
         <p:txBody>
           <a:bodyPr rtlCol="0">
-            <a:normAutofit fontScale="85000" lnSpcReduction="20000"/>
+            <a:normAutofit lnSpcReduction="10000"/>
           </a:bodyPr>
           <a:lstStyle/>
           <a:p>
@@ -13525,17 +13319,19 @@
         </p:nvSpPr>
         <p:spPr>
           <a:xfrm>
-            <a:off x="2133601" y="309563"/>
+            <a:off x="408318" y="0"/>
             <a:ext cx="6348413" cy="1320800"/>
           </a:xfrm>
         </p:spPr>
         <p:txBody>
-          <a:bodyPr/>
+          <a:bodyPr>
+            <a:normAutofit/>
+          </a:bodyPr>
           <a:lstStyle/>
           <a:p>
             <a:pPr eaLnBrk="1" hangingPunct="1"/>
             <a:r>
-              <a:rPr lang="en-US" altLang="en-US" sz="2000"/>
+              <a:rPr lang="en-US" altLang="en-US" sz="3600" dirty="0"/>
               <a:t>Random Access – Carrier Sense Multiple Access (CSMA)</a:t>
             </a:r>
           </a:p>
@@ -13553,8 +13349,8 @@
         </p:nvSpPr>
         <p:spPr>
           <a:xfrm>
-            <a:off x="2133601" y="1266825"/>
-            <a:ext cx="6348413" cy="3881438"/>
+            <a:off x="552091" y="1266825"/>
+            <a:ext cx="11110026" cy="3881438"/>
           </a:xfrm>
         </p:spPr>
         <p:txBody>
@@ -13566,7 +13362,7 @@
               <a:buChar char="§"/>
             </a:pPr>
             <a:r>
-              <a:rPr lang="en-US" altLang="en-US" smtClean="0"/>
+              <a:rPr lang="en-US" altLang="en-US" dirty="0" smtClean="0"/>
               <a:t> Vulnerable time for CSMA is the maximum propagation time</a:t>
             </a:r>
           </a:p>
@@ -13576,13 +13372,13 @@
               <a:buChar char="§"/>
             </a:pPr>
             <a:r>
-              <a:rPr lang="en-US" altLang="en-US" smtClean="0"/>
+              <a:rPr lang="en-US" altLang="en-US" dirty="0" smtClean="0"/>
               <a:t> The longer the propagation delay, the worse the performance of the protocol because of the above case.</a:t>
             </a:r>
           </a:p>
           <a:p>
             <a:pPr eaLnBrk="1" hangingPunct="1"/>
-            <a:endParaRPr lang="en-US" altLang="en-US" smtClean="0"/>
+            <a:endParaRPr lang="en-US" altLang="en-US" dirty="0" smtClean="0"/>
           </a:p>
         </p:txBody>
       </p:sp>
@@ -13596,6 +13392,13 @@
   <p:clrMapOvr>
     <a:masterClrMapping/>
   </p:clrMapOvr>
+  <p:timing>
+    <p:tnLst>
+      <p:par>
+        <p:cTn id="1" dur="indefinite" restart="never" nodeType="tmRoot"/>
+      </p:par>
+    </p:tnLst>
+  </p:timing>
 </p:sld>
 </file>
 
@@ -13628,7 +13431,7 @@
         </p:nvSpPr>
         <p:spPr>
           <a:xfrm>
-            <a:off x="1981200" y="381000"/>
+            <a:off x="549215" y="228600"/>
             <a:ext cx="7772400" cy="762000"/>
           </a:xfrm>
         </p:spPr>
@@ -13638,10 +13441,10 @@
           <a:p>
             <a:pPr eaLnBrk="1" hangingPunct="1"/>
             <a:r>
-              <a:rPr lang="en-US" altLang="en-US" sz="2800"/>
+              <a:rPr lang="en-US" altLang="en-US" sz="2800" dirty="0"/>
               <a:t>Types of CSMA Protocols</a:t>
             </a:r>
-            <a:endParaRPr lang="en-US" altLang="en-US" sz="2400">
+            <a:endParaRPr lang="en-US" altLang="en-US" sz="2400" dirty="0">
               <a:solidFill>
                 <a:srgbClr val="000000"/>
               </a:solidFill>
@@ -13663,8 +13466,8 @@
         </p:nvSpPr>
         <p:spPr>
           <a:xfrm>
-            <a:off x="2209800" y="990600"/>
-            <a:ext cx="7772400" cy="5486400"/>
+            <a:off x="549215" y="990600"/>
+            <a:ext cx="11422391" cy="5486400"/>
           </a:xfrm>
         </p:spPr>
         <p:txBody>
@@ -13675,14 +13478,14 @@
               <a:buFont typeface="Wingdings" panose="05000000000000000000" pitchFamily="2" charset="2"/>
               <a:buAutoNum type="arabicPeriod"/>
             </a:pPr>
-            <a:endParaRPr lang="en-US" altLang="en-US" sz="2000"/>
+            <a:endParaRPr lang="en-US" altLang="en-US" sz="2000" dirty="0"/>
           </a:p>
           <a:p>
             <a:pPr marL="990600" lvl="1" indent="-533400">
               <a:buNone/>
             </a:pPr>
             <a:r>
-              <a:rPr lang="en-US" altLang="en-US" sz="2000"/>
+              <a:rPr lang="en-US" altLang="en-US" sz="2000" dirty="0"/>
               <a:t>Different CSMA protocols that determine:</a:t>
             </a:r>
           </a:p>
@@ -13693,7 +13496,7 @@
               <a:buChar char="§"/>
             </a:pPr>
             <a:r>
-              <a:rPr lang="en-US" altLang="en-US" sz="2000"/>
+              <a:rPr lang="en-US" altLang="en-US" sz="2000" dirty="0"/>
               <a:t>What a station should do when the medium is idle?</a:t>
             </a:r>
           </a:p>
@@ -13704,7 +13507,7 @@
               <a:buChar char="§"/>
             </a:pPr>
             <a:r>
-              <a:rPr lang="en-US" altLang="en-US" sz="2000"/>
+              <a:rPr lang="en-US" altLang="en-US" sz="2000" dirty="0"/>
               <a:t>What a station should do when the medium is busy? </a:t>
             </a:r>
           </a:p>
@@ -13713,7 +13516,7 @@
               <a:buFont typeface="Wingdings" panose="05000000000000000000" pitchFamily="2" charset="2"/>
               <a:buAutoNum type="arabicPeriod"/>
             </a:pPr>
-            <a:endParaRPr lang="en-US" altLang="en-US" sz="2000"/>
+            <a:endParaRPr lang="en-US" altLang="en-US" sz="2000" dirty="0"/>
           </a:p>
           <a:p>
             <a:pPr marL="1371600" lvl="2" indent="-457200">
@@ -13721,7 +13524,7 @@
               <a:buAutoNum type="arabicPeriod"/>
             </a:pPr>
             <a:r>
-              <a:rPr lang="en-US" altLang="en-US"/>
+              <a:rPr lang="en-US" altLang="en-US" dirty="0"/>
               <a:t>Non-Persistent CSMA</a:t>
             </a:r>
           </a:p>
@@ -13731,7 +13534,7 @@
               <a:buAutoNum type="arabicPeriod"/>
             </a:pPr>
             <a:r>
-              <a:rPr lang="en-US" altLang="en-US"/>
+              <a:rPr lang="en-US" altLang="en-US" dirty="0"/>
               <a:t>1-Persistent CSMA</a:t>
             </a:r>
           </a:p>
@@ -13741,7 +13544,7 @@
               <a:buAutoNum type="arabicPeriod"/>
             </a:pPr>
             <a:r>
-              <a:rPr lang="en-US" altLang="en-US"/>
+              <a:rPr lang="en-US" altLang="en-US" dirty="0"/>
               <a:t>p-Persistent CSMA</a:t>
             </a:r>
           </a:p>
@@ -13750,7 +13553,7 @@
               <a:buFont typeface="Wingdings" panose="05000000000000000000" pitchFamily="2" charset="2"/>
               <a:buAutoNum type="arabicPeriod"/>
             </a:pPr>
-            <a:endParaRPr lang="en-US" altLang="en-US" sz="2400"/>
+            <a:endParaRPr lang="en-US" altLang="en-US" sz="2400" dirty="0"/>
           </a:p>
         </p:txBody>
       </p:sp>
@@ -13764,6 +13567,13 @@
   <p:clrMapOvr>
     <a:masterClrMapping/>
   </p:clrMapOvr>
+  <p:timing>
+    <p:tnLst>
+      <p:par>
+        <p:cTn id="1" dur="indefinite" restart="never" nodeType="tmRoot"/>
+      </p:par>
+    </p:tnLst>
+  </p:timing>
 </p:sld>
 </file>
 
@@ -14812,7 +14622,7 @@
         </p:nvSpPr>
         <p:spPr>
           <a:xfrm>
-            <a:off x="2160589" y="398463"/>
+            <a:off x="255587" y="80964"/>
             <a:ext cx="6346825" cy="1320800"/>
           </a:xfrm>
         </p:spPr>
@@ -14822,13 +14632,13 @@
           <a:p>
             <a:pPr eaLnBrk="1" hangingPunct="1"/>
             <a:r>
-              <a:rPr lang="en-US" altLang="en-US" smtClean="0"/>
+              <a:rPr lang="en-US" altLang="en-US" dirty="0" smtClean="0"/>
               <a:t>1) Non-persistent CSMA</a:t>
             </a:r>
             <a:br>
-              <a:rPr lang="en-US" altLang="en-US" smtClean="0"/>
+              <a:rPr lang="en-US" altLang="en-US" dirty="0" smtClean="0"/>
             </a:br>
-            <a:endParaRPr lang="en-US" altLang="en-US" smtClean="0"/>
+            <a:endParaRPr lang="en-US" altLang="en-US" dirty="0" smtClean="0"/>
           </a:p>
         </p:txBody>
       </p:sp>
@@ -14850,13 +14660,13 @@
         </p:nvSpPr>
         <p:spPr>
           <a:xfrm>
-            <a:off x="1981200" y="1071564"/>
-            <a:ext cx="7543800" cy="3830637"/>
+            <a:off x="479540" y="788988"/>
+            <a:ext cx="11232919" cy="3830637"/>
           </a:xfrm>
         </p:spPr>
         <p:txBody>
           <a:bodyPr rtlCol="0">
-            <a:normAutofit fontScale="85000" lnSpcReduction="10000"/>
+            <a:normAutofit/>
           </a:bodyPr>
           <a:lstStyle/>
           <a:p>
@@ -15037,6 +14847,13 @@
   <p:clrMapOvr>
     <a:masterClrMapping/>
   </p:clrMapOvr>
+  <p:timing>
+    <p:tnLst>
+      <p:par>
+        <p:cTn id="1" dur="indefinite" restart="never" nodeType="tmRoot"/>
+      </p:par>
+    </p:tnLst>
+  </p:timing>
 </p:sld>
 </file>
 
@@ -15353,7 +15170,7 @@
         </p:nvSpPr>
         <p:spPr>
           <a:xfrm>
-            <a:off x="2082801" y="82550"/>
+            <a:off x="524164" y="0"/>
             <a:ext cx="6348413" cy="1320800"/>
           </a:xfrm>
         </p:spPr>
@@ -15363,13 +15180,13 @@
           <a:p>
             <a:pPr eaLnBrk="1" hangingPunct="1"/>
             <a:r>
-              <a:rPr lang="en-US" altLang="en-US" smtClean="0"/>
+              <a:rPr lang="en-US" altLang="en-US" dirty="0" smtClean="0"/>
               <a:t>2) 1-persistent CSMA</a:t>
             </a:r>
             <a:br>
-              <a:rPr lang="en-US" altLang="en-US" smtClean="0"/>
+              <a:rPr lang="en-US" altLang="en-US" dirty="0" smtClean="0"/>
             </a:br>
-            <a:endParaRPr lang="en-US" altLang="en-US" smtClean="0"/>
+            <a:endParaRPr lang="en-US" altLang="en-US" dirty="0" smtClean="0"/>
           </a:p>
         </p:txBody>
       </p:sp>
@@ -15385,13 +15202,13 @@
         </p:nvSpPr>
         <p:spPr>
           <a:xfrm>
-            <a:off x="1752600" y="990600"/>
-            <a:ext cx="7010400" cy="3881438"/>
+            <a:off x="618978" y="751681"/>
+            <a:ext cx="10621107" cy="3881438"/>
           </a:xfrm>
         </p:spPr>
         <p:txBody>
           <a:bodyPr>
-            <a:normAutofit fontScale="92500" lnSpcReduction="20000"/>
+            <a:normAutofit/>
           </a:bodyPr>
           <a:lstStyle/>
           <a:p>
@@ -15407,10 +15224,10 @@
               <a:buChar char="n"/>
             </a:pPr>
             <a:r>
-              <a:rPr lang="en-US" altLang="en-US" smtClean="0"/>
+              <a:rPr lang="en-US" altLang="en-US" dirty="0" smtClean="0"/>
               <a:t>To avoid idle channel time, 1-persistent protocol used</a:t>
             </a:r>
-            <a:endParaRPr lang="en-GB" altLang="en-US" smtClean="0"/>
+            <a:endParaRPr lang="en-GB" altLang="en-US" dirty="0" smtClean="0"/>
           </a:p>
           <a:p>
             <a:pPr eaLnBrk="1" hangingPunct="1">
@@ -15425,11 +15242,11 @@
               <a:buChar char="n"/>
             </a:pPr>
             <a:r>
-              <a:rPr lang="en-GB" altLang="en-US" smtClean="0"/>
+              <a:rPr lang="en-GB" altLang="en-US" dirty="0" smtClean="0"/>
               <a:t>Station </a:t>
             </a:r>
             <a:r>
-              <a:rPr lang="en-US" altLang="en-US" smtClean="0"/>
+              <a:rPr lang="en-US" altLang="en-US" dirty="0" smtClean="0"/>
               <a:t>wishing to transmit listens to the medium:</a:t>
             </a:r>
           </a:p>
@@ -15446,15 +15263,15 @@
               <a:buAutoNum type="arabicPeriod"/>
             </a:pPr>
             <a:r>
-              <a:rPr lang="en-US" altLang="en-US" smtClean="0"/>
+              <a:rPr lang="en-US" altLang="en-US" dirty="0" smtClean="0"/>
               <a:t>If medium idle, </a:t>
             </a:r>
             <a:r>
-              <a:rPr lang="en-US" altLang="en-US" b="1" smtClean="0"/>
+              <a:rPr lang="en-US" altLang="en-US" b="1" dirty="0" smtClean="0"/>
               <a:t>transmit</a:t>
             </a:r>
             <a:r>
-              <a:rPr lang="en-US" altLang="en-US" smtClean="0"/>
+              <a:rPr lang="en-US" altLang="en-US" dirty="0" smtClean="0"/>
               <a:t> immediately; </a:t>
             </a:r>
           </a:p>
@@ -15471,15 +15288,15 @@
               <a:buAutoNum type="arabicPeriod"/>
             </a:pPr>
             <a:r>
-              <a:rPr lang="en-US" altLang="en-US" smtClean="0"/>
+              <a:rPr lang="en-US" altLang="en-US" dirty="0" smtClean="0"/>
               <a:t>If medium busy, </a:t>
             </a:r>
             <a:r>
-              <a:rPr lang="en-US" altLang="en-US" b="1" smtClean="0"/>
+              <a:rPr lang="en-US" altLang="en-US" b="1" dirty="0" smtClean="0"/>
               <a:t>continuously listen</a:t>
             </a:r>
             <a:r>
-              <a:rPr lang="en-US" altLang="en-US" smtClean="0"/>
+              <a:rPr lang="en-US" altLang="en-US" dirty="0" smtClean="0"/>
               <a:t> until medium becomes idle; then transmit immediately with probability 1</a:t>
             </a:r>
           </a:p>
@@ -15496,7 +15313,7 @@
               <a:buChar char="§"/>
             </a:pPr>
             <a:r>
-              <a:rPr lang="en-US" altLang="en-US" smtClean="0"/>
+              <a:rPr lang="en-US" altLang="en-US" dirty="0" smtClean="0"/>
               <a:t>Performance</a:t>
             </a:r>
           </a:p>
@@ -15513,14 +15330,14 @@
               <a:buChar char="§"/>
             </a:pPr>
             <a:r>
-              <a:rPr lang="en-US" altLang="en-US" smtClean="0"/>
+              <a:rPr lang="en-US" altLang="en-US" dirty="0" smtClean="0"/>
               <a:t>1-persistent stations are </a:t>
             </a:r>
             <a:r>
-              <a:rPr lang="en-US" altLang="en-US" b="1" smtClean="0"/>
+              <a:rPr lang="en-US" altLang="en-US" b="1" dirty="0" smtClean="0"/>
               <a:t>selfish</a:t>
             </a:r>
-            <a:endParaRPr lang="en-GB" altLang="en-US" b="1" smtClean="0"/>
+            <a:endParaRPr lang="en-GB" altLang="en-US" b="1" dirty="0" smtClean="0"/>
           </a:p>
           <a:p>
             <a:pPr lvl="1" eaLnBrk="1" hangingPunct="1">
@@ -15535,18 +15352,18 @@
               <a:buChar char="§"/>
             </a:pPr>
             <a:r>
-              <a:rPr lang="en-US" altLang="en-US" smtClean="0"/>
+              <a:rPr lang="en-US" altLang="en-US" dirty="0" smtClean="0"/>
               <a:t>If two or more stations becomes ready at the same time</a:t>
             </a:r>
             <a:r>
-              <a:rPr lang="en-GB" altLang="en-US" smtClean="0"/>
+              <a:rPr lang="en-GB" altLang="en-US" dirty="0" smtClean="0"/>
               <a:t>, </a:t>
             </a:r>
             <a:r>
-              <a:rPr lang="en-US" altLang="en-US" b="1" smtClean="0"/>
+              <a:rPr lang="en-US" altLang="en-US" b="1" dirty="0" smtClean="0"/>
               <a:t>collision guaranteed</a:t>
             </a:r>
-            <a:endParaRPr lang="en-GB" altLang="en-US" b="1" smtClean="0"/>
+            <a:endParaRPr lang="en-GB" altLang="en-US" b="1" dirty="0" smtClean="0"/>
           </a:p>
           <a:p>
             <a:pPr lvl="1" eaLnBrk="1" hangingPunct="1">
@@ -15560,7 +15377,7 @@
               <a:buFont typeface="Wingdings 3" panose="05040102010807070707" pitchFamily="18" charset="2"/>
               <a:buNone/>
             </a:pPr>
-            <a:endParaRPr lang="en-US" altLang="en-US" b="1" smtClean="0"/>
+            <a:endParaRPr lang="en-US" altLang="en-US" b="1" dirty="0" smtClean="0"/>
           </a:p>
           <a:p>
             <a:pPr eaLnBrk="1" hangingPunct="1">
@@ -15574,11 +15391,11 @@
               <a:buFont typeface="Wingdings" panose="05000000000000000000" pitchFamily="2" charset="2"/>
               <a:buChar char="n"/>
             </a:pPr>
-            <a:endParaRPr lang="en-US" altLang="en-US" smtClean="0"/>
+            <a:endParaRPr lang="en-US" altLang="en-US" dirty="0" smtClean="0"/>
           </a:p>
           <a:p>
             <a:pPr eaLnBrk="1" hangingPunct="1"/>
-            <a:endParaRPr lang="en-US" altLang="en-US" smtClean="0"/>
+            <a:endParaRPr lang="en-US" altLang="en-US" dirty="0" smtClean="0"/>
           </a:p>
         </p:txBody>
       </p:sp>
@@ -15872,7 +15689,7 @@
         </p:blipFill>
         <p:spPr bwMode="auto">
           <a:xfrm>
-            <a:off x="2438400" y="4038600"/>
+            <a:off x="2593145" y="4376225"/>
             <a:ext cx="6973888" cy="2370138"/>
           </a:xfrm>
           <a:prstGeom prst="rect">
@@ -15915,7 +15732,7 @@
         </p:nvSpPr>
         <p:spPr>
           <a:xfrm>
-            <a:off x="2138364" y="0"/>
+            <a:off x="171541" y="-265532"/>
             <a:ext cx="6346825" cy="1320800"/>
           </a:xfrm>
         </p:spPr>
@@ -15925,7 +15742,7 @@
           <a:p>
             <a:pPr eaLnBrk="1" hangingPunct="1"/>
             <a:r>
-              <a:rPr lang="en-US" altLang="en-US" smtClean="0"/>
+              <a:rPr lang="en-US" altLang="en-US" dirty="0" smtClean="0"/>
               <a:t>3) P-persistent CSMA</a:t>
             </a:r>
           </a:p>
@@ -15943,13 +15760,13 @@
         </p:nvSpPr>
         <p:spPr>
           <a:xfrm>
-            <a:off x="1692275" y="762000"/>
-            <a:ext cx="7239000" cy="3881438"/>
+            <a:off x="741872" y="762000"/>
+            <a:ext cx="11450128" cy="3881438"/>
           </a:xfrm>
         </p:spPr>
         <p:txBody>
           <a:bodyPr>
-            <a:normAutofit fontScale="92500" lnSpcReduction="20000"/>
+            <a:normAutofit fontScale="92500" lnSpcReduction="10000"/>
           </a:bodyPr>
           <a:lstStyle/>
           <a:p>
@@ -15965,18 +15782,18 @@
               <a:buChar char="n"/>
             </a:pPr>
             <a:r>
-              <a:rPr lang="en-GB" altLang="en-US" smtClean="0"/>
+              <a:rPr lang="en-GB" altLang="en-US" dirty="0" smtClean="0"/>
               <a:t>Time is divided to slots where each Time</a:t>
             </a:r>
             <a:r>
-              <a:rPr lang="en-US" altLang="en-US" smtClean="0"/>
+              <a:rPr lang="en-US" altLang="en-US" dirty="0" smtClean="0"/>
               <a:t> unit (slot) typically equals </a:t>
             </a:r>
             <a:r>
-              <a:rPr lang="en-US" altLang="en-US" b="1" smtClean="0"/>
+              <a:rPr lang="en-US" altLang="en-US" b="1" dirty="0" smtClean="0"/>
               <a:t>maximum propagation delay</a:t>
             </a:r>
-            <a:endParaRPr lang="en-GB" altLang="en-US" smtClean="0"/>
+            <a:endParaRPr lang="en-GB" altLang="en-US" dirty="0" smtClean="0"/>
           </a:p>
           <a:p>
             <a:pPr eaLnBrk="1" hangingPunct="1">
@@ -15991,11 +15808,11 @@
               <a:buChar char="n"/>
             </a:pPr>
             <a:r>
-              <a:rPr lang="en-GB" altLang="en-US" smtClean="0"/>
+              <a:rPr lang="en-GB" altLang="en-US" dirty="0" smtClean="0"/>
               <a:t>Station </a:t>
             </a:r>
             <a:r>
-              <a:rPr lang="en-US" altLang="en-US" smtClean="0"/>
+              <a:rPr lang="en-US" altLang="en-US" dirty="0" smtClean="0"/>
               <a:t>wishing to transmit listens to the medium:</a:t>
             </a:r>
           </a:p>
@@ -16012,11 +15829,11 @@
               <a:buAutoNum type="arabicPeriod"/>
             </a:pPr>
             <a:r>
-              <a:rPr lang="en-GB" altLang="en-US" smtClean="0"/>
+              <a:rPr lang="en-GB" altLang="en-US" dirty="0" smtClean="0"/>
               <a:t>If</a:t>
             </a:r>
             <a:r>
-              <a:rPr lang="en-US" altLang="en-US" smtClean="0"/>
+              <a:rPr lang="en-US" altLang="en-US" dirty="0" smtClean="0"/>
               <a:t> medium idle, </a:t>
             </a:r>
           </a:p>
@@ -16033,15 +15850,15 @@
               <a:buChar char="§"/>
             </a:pPr>
             <a:r>
-              <a:rPr lang="en-US" altLang="en-US" smtClean="0"/>
+              <a:rPr lang="en-US" altLang="en-US" dirty="0" smtClean="0"/>
               <a:t>transmit with probability (</a:t>
             </a:r>
             <a:r>
-              <a:rPr lang="en-US" altLang="en-US" b="1" smtClean="0"/>
+              <a:rPr lang="en-US" altLang="en-US" b="1" dirty="0" smtClean="0"/>
               <a:t>p</a:t>
             </a:r>
             <a:r>
-              <a:rPr lang="en-US" altLang="en-US" smtClean="0"/>
+              <a:rPr lang="en-US" altLang="en-US" dirty="0" smtClean="0"/>
               <a:t>), OR</a:t>
             </a:r>
           </a:p>
@@ -16058,26 +15875,26 @@
               <a:buChar char="§"/>
             </a:pPr>
             <a:r>
-              <a:rPr lang="en-US" altLang="en-US" smtClean="0"/>
+              <a:rPr lang="en-US" altLang="en-US" dirty="0" smtClean="0"/>
               <a:t>wait </a:t>
             </a:r>
             <a:r>
-              <a:rPr lang="en-US" altLang="en-US" b="1" smtClean="0"/>
+              <a:rPr lang="en-US" altLang="en-US" b="1" dirty="0" smtClean="0"/>
               <a:t>one time unit (slot) </a:t>
             </a:r>
             <a:r>
-              <a:rPr lang="en-US" altLang="en-US" smtClean="0"/>
+              <a:rPr lang="en-US" altLang="en-US" dirty="0" smtClean="0"/>
               <a:t>with probability (</a:t>
             </a:r>
             <a:r>
-              <a:rPr lang="en-US" altLang="en-US" b="1" smtClean="0"/>
+              <a:rPr lang="en-US" altLang="en-US" b="1" dirty="0" smtClean="0"/>
               <a:t>1 – p</a:t>
             </a:r>
             <a:r>
-              <a:rPr lang="en-US" altLang="en-US" smtClean="0"/>
+              <a:rPr lang="en-US" altLang="en-US" dirty="0" smtClean="0"/>
               <a:t>), then repeat 1.</a:t>
             </a:r>
-            <a:endParaRPr lang="en-GB" altLang="en-US" smtClean="0"/>
+            <a:endParaRPr lang="en-GB" altLang="en-US" dirty="0" smtClean="0"/>
           </a:p>
           <a:p>
             <a:pPr eaLnBrk="1" hangingPunct="1">
@@ -16092,27 +15909,27 @@
               <a:buAutoNum type="arabicPeriod"/>
             </a:pPr>
             <a:r>
-              <a:rPr lang="en-US" altLang="en-US" smtClean="0"/>
+              <a:rPr lang="en-US" altLang="en-US" dirty="0" smtClean="0"/>
               <a:t>If medium busy, </a:t>
             </a:r>
             <a:r>
-              <a:rPr lang="en-US" altLang="en-US" b="1" smtClean="0"/>
+              <a:rPr lang="en-US" altLang="en-US" b="1" dirty="0" smtClean="0"/>
               <a:t>continuously listen until</a:t>
             </a:r>
             <a:r>
-              <a:rPr lang="en-US" altLang="en-US" smtClean="0"/>
+              <a:rPr lang="en-US" altLang="en-US" dirty="0" smtClean="0"/>
               <a:t> </a:t>
             </a:r>
             <a:r>
-              <a:rPr lang="en-US" altLang="en-US" b="1" smtClean="0"/>
+              <a:rPr lang="en-US" altLang="en-US" b="1" dirty="0" smtClean="0"/>
               <a:t>idle</a:t>
             </a:r>
             <a:r>
-              <a:rPr lang="en-US" altLang="en-US" smtClean="0"/>
+              <a:rPr lang="en-US" altLang="en-US" dirty="0" smtClean="0"/>
               <a:t> and repeat step </a:t>
             </a:r>
             <a:r>
-              <a:rPr lang="en-US" altLang="en-US" b="1" smtClean="0"/>
+              <a:rPr lang="en-US" altLang="en-US" b="1" dirty="0" smtClean="0"/>
               <a:t>1</a:t>
             </a:r>
           </a:p>
@@ -16129,7 +15946,7 @@
               <a:buAutoNum type="arabicPeriod"/>
             </a:pPr>
             <a:r>
-              <a:rPr lang="en-US" altLang="en-US" smtClean="0"/>
+              <a:rPr lang="en-US" altLang="en-US" dirty="0" smtClean="0"/>
               <a:t>Performance</a:t>
             </a:r>
           </a:p>
@@ -16146,15 +15963,15 @@
               <a:buChar char="n"/>
             </a:pPr>
             <a:r>
-              <a:rPr lang="en-US" altLang="en-US" smtClean="0"/>
+              <a:rPr lang="en-US" altLang="en-US" dirty="0" smtClean="0"/>
               <a:t>Reduces the possibility of collisions</a:t>
             </a:r>
             <a:r>
-              <a:rPr lang="en-GB" altLang="en-US" smtClean="0"/>
+              <a:rPr lang="en-GB" altLang="en-US" dirty="0" smtClean="0"/>
               <a:t> like </a:t>
             </a:r>
             <a:r>
-              <a:rPr lang="en-GB" altLang="en-US" b="1" smtClean="0"/>
+              <a:rPr lang="en-GB" altLang="en-US" b="1" dirty="0" smtClean="0"/>
               <a:t>non-persistent</a:t>
             </a:r>
           </a:p>
@@ -16171,18 +15988,18 @@
               <a:buChar char="n"/>
             </a:pPr>
             <a:r>
-              <a:rPr lang="en-US" altLang="en-US" smtClean="0"/>
+              <a:rPr lang="en-US" altLang="en-US" dirty="0" smtClean="0"/>
               <a:t>Reduces channel idle time</a:t>
             </a:r>
             <a:r>
-              <a:rPr lang="en-GB" altLang="en-US" smtClean="0"/>
+              <a:rPr lang="en-GB" altLang="en-US" dirty="0" smtClean="0"/>
               <a:t> like </a:t>
             </a:r>
             <a:r>
-              <a:rPr lang="en-US" altLang="en-US" b="1" smtClean="0"/>
+              <a:rPr lang="en-US" altLang="en-US" b="1" dirty="0" smtClean="0"/>
               <a:t>1-persistent</a:t>
             </a:r>
-            <a:endParaRPr lang="en-GB" altLang="en-US" b="1" smtClean="0"/>
+            <a:endParaRPr lang="en-GB" altLang="en-US" b="1" dirty="0" smtClean="0"/>
           </a:p>
           <a:p>
             <a:pPr lvl="1" eaLnBrk="1" hangingPunct="1">
@@ -16196,7 +16013,7 @@
               <a:buFontTx/>
               <a:buAutoNum type="arabicPeriod"/>
             </a:pPr>
-            <a:endParaRPr lang="en-US" altLang="en-US" b="1" smtClean="0"/>
+            <a:endParaRPr lang="en-US" altLang="en-US" b="1" dirty="0" smtClean="0"/>
           </a:p>
           <a:p>
             <a:pPr eaLnBrk="1" hangingPunct="1">
@@ -16210,11 +16027,11 @@
               <a:buFont typeface="Wingdings 3" panose="05040102010807070707" pitchFamily="18" charset="2"/>
               <a:buNone/>
             </a:pPr>
-            <a:endParaRPr lang="en-GB" altLang="en-US" smtClean="0"/>
+            <a:endParaRPr lang="en-GB" altLang="en-US" dirty="0" smtClean="0"/>
           </a:p>
           <a:p>
             <a:pPr eaLnBrk="1" hangingPunct="1"/>
-            <a:endParaRPr lang="en-US" altLang="en-US" smtClean="0"/>
+            <a:endParaRPr lang="en-US" altLang="en-US" dirty="0" smtClean="0"/>
           </a:p>
         </p:txBody>
       </p:sp>
@@ -16228,6 +16045,13 @@
   <p:clrMapOvr>
     <a:masterClrMapping/>
   </p:clrMapOvr>
+  <p:timing>
+    <p:tnLst>
+      <p:par>
+        <p:cTn id="1" dur="indefinite" restart="never" nodeType="tmRoot"/>
+      </p:par>
+    </p:tnLst>
+  </p:timing>
 </p:sld>
 </file>
 
@@ -16280,13 +16104,18 @@
             <p:ph idx="1"/>
           </p:nvPr>
         </p:nvSpPr>
-        <p:spPr/>
+        <p:spPr>
+          <a:xfrm>
+            <a:off x="838200" y="1825625"/>
+            <a:ext cx="11119338" cy="4351338"/>
+          </a:xfrm>
+        </p:spPr>
         <p:txBody>
           <a:bodyPr/>
           <a:lstStyle/>
           <a:p>
             <a:r>
-              <a:rPr lang="en-US" altLang="en-US" smtClean="0">
+              <a:rPr lang="en-US" altLang="en-US" dirty="0" smtClean="0">
                 <a:cs typeface="Times New Roman" panose="02020603050405020304" pitchFamily="18" charset="0"/>
               </a:rPr>
               <a:t>the time slot is usually set to the maximum propagation delay.</a:t>
@@ -16294,19 +16123,19 @@
           </a:p>
           <a:p>
             <a:r>
-              <a:rPr lang="en-US" altLang="en-US" smtClean="0">
+              <a:rPr lang="en-US" altLang="en-US" dirty="0" smtClean="0">
                 <a:cs typeface="Times New Roman" panose="02020603050405020304" pitchFamily="18" charset="0"/>
               </a:rPr>
               <a:t>as </a:t>
             </a:r>
             <a:r>
-              <a:rPr lang="en-US" altLang="en-US" b="1" smtClean="0">
+              <a:rPr lang="en-US" altLang="en-US" b="1" dirty="0" smtClean="0">
                 <a:cs typeface="Times New Roman" panose="02020603050405020304" pitchFamily="18" charset="0"/>
               </a:rPr>
               <a:t>p </a:t>
             </a:r>
             <a:r>
-              <a:rPr lang="en-US" altLang="en-US" smtClean="0">
+              <a:rPr lang="en-US" altLang="en-US" dirty="0" smtClean="0">
                 <a:cs typeface="Times New Roman" panose="02020603050405020304" pitchFamily="18" charset="0"/>
               </a:rPr>
               <a:t>decreases,  stations wait longer to transmit but the number of collisions decreases</a:t>
@@ -16314,13 +16143,13 @@
           </a:p>
           <a:p>
             <a:r>
-              <a:rPr lang="en-US" altLang="en-US" smtClean="0">
+              <a:rPr lang="en-US" altLang="en-US" dirty="0" smtClean="0">
                 <a:cs typeface="Times New Roman" panose="02020603050405020304" pitchFamily="18" charset="0"/>
               </a:rPr>
               <a:t>Considerations for the choice of </a:t>
             </a:r>
             <a:r>
-              <a:rPr lang="en-US" altLang="en-US" b="1" smtClean="0">
+              <a:rPr lang="en-US" altLang="en-US" b="1" dirty="0" smtClean="0">
                 <a:cs typeface="Times New Roman" panose="02020603050405020304" pitchFamily="18" charset="0"/>
               </a:rPr>
               <a:t>p: </a:t>
@@ -16328,37 +16157,37 @@
           </a:p>
           <a:p>
             <a:r>
-              <a:rPr lang="en-US" altLang="en-US" b="1" smtClean="0">
+              <a:rPr lang="en-US" altLang="en-US" b="1" dirty="0" smtClean="0">
                 <a:cs typeface="Times New Roman" panose="02020603050405020304" pitchFamily="18" charset="0"/>
               </a:rPr>
               <a:t>(n x p)</a:t>
             </a:r>
             <a:r>
-              <a:rPr lang="en-US" altLang="en-US" smtClean="0">
+              <a:rPr lang="en-US" altLang="en-US" dirty="0" smtClean="0">
                 <a:cs typeface="Times New Roman" panose="02020603050405020304" pitchFamily="18" charset="0"/>
               </a:rPr>
               <a:t> must be </a:t>
             </a:r>
             <a:r>
-              <a:rPr lang="en-US" altLang="en-US" b="1" smtClean="0">
+              <a:rPr lang="en-US" altLang="en-US" b="1" dirty="0" smtClean="0">
                 <a:cs typeface="Times New Roman" panose="02020603050405020304" pitchFamily="18" charset="0"/>
               </a:rPr>
               <a:t>&lt; 1</a:t>
             </a:r>
             <a:r>
-              <a:rPr lang="en-US" altLang="en-US" smtClean="0">
+              <a:rPr lang="en-US" altLang="en-US" dirty="0" smtClean="0">
                 <a:cs typeface="Times New Roman" panose="02020603050405020304" pitchFamily="18" charset="0"/>
               </a:rPr>
               <a:t> for stability, where </a:t>
             </a:r>
             <a:r>
-              <a:rPr lang="en-US" altLang="en-US" b="1" smtClean="0">
+              <a:rPr lang="en-US" altLang="en-US" b="1" dirty="0" smtClean="0">
                 <a:cs typeface="Times New Roman" panose="02020603050405020304" pitchFamily="18" charset="0"/>
               </a:rPr>
               <a:t>n</a:t>
             </a:r>
             <a:r>
-              <a:rPr lang="en-US" altLang="en-US" smtClean="0">
+              <a:rPr lang="en-US" altLang="en-US" dirty="0" smtClean="0">
                 <a:cs typeface="Times New Roman" panose="02020603050405020304" pitchFamily="18" charset="0"/>
               </a:rPr>
               <a:t> is maximum number of stations, i.e.,</a:t>
@@ -16370,13 +16199,13 @@
               <a:buNone/>
             </a:pPr>
             <a:r>
-              <a:rPr lang="en-US" altLang="en-US" smtClean="0">
+              <a:rPr lang="en-US" altLang="en-US" dirty="0" smtClean="0">
                 <a:cs typeface="Times New Roman" panose="02020603050405020304" pitchFamily="18" charset="0"/>
               </a:rPr>
               <a:t>                                     </a:t>
             </a:r>
             <a:r>
-              <a:rPr lang="en-US" altLang="en-US" smtClean="0">
+              <a:rPr lang="en-US" altLang="en-US" dirty="0" smtClean="0">
                 <a:solidFill>
                   <a:srgbClr val="000066"/>
                 </a:solidFill>
@@ -16384,12 +16213,12 @@
               </a:rPr>
               <a:t>p &lt; 1/n</a:t>
             </a:r>
-            <a:endParaRPr lang="en-US" altLang="en-US" smtClean="0">
+            <a:endParaRPr lang="en-US" altLang="en-US" dirty="0" smtClean="0">
               <a:cs typeface="Times New Roman" panose="02020603050405020304" pitchFamily="18" charset="0"/>
             </a:endParaRPr>
           </a:p>
           <a:p>
-            <a:endParaRPr lang="en-US" altLang="en-US" smtClean="0"/>
+            <a:endParaRPr lang="en-US" altLang="en-US" dirty="0" smtClean="0"/>
           </a:p>
         </p:txBody>
       </p:sp>
@@ -16403,6 +16232,13 @@
   <p:clrMapOvr>
     <a:masterClrMapping/>
   </p:clrMapOvr>
+  <p:timing>
+    <p:tnLst>
+      <p:par>
+        <p:cTn id="1" dur="indefinite" restart="never" nodeType="tmRoot"/>
+      </p:par>
+    </p:tnLst>
+  </p:timing>
 </p:sld>
 </file>
 
@@ -16667,8 +16503,8 @@
         </p:nvSpPr>
         <p:spPr bwMode="auto">
           <a:xfrm>
-            <a:off x="1936750" y="1066800"/>
-            <a:ext cx="7131050" cy="4800600"/>
+            <a:off x="546970" y="1188720"/>
+            <a:ext cx="11298027" cy="4800600"/>
           </a:xfrm>
           <a:prstGeom prst="rect">
             <a:avLst/>
@@ -17031,7 +16867,7 @@
         </p:nvSpPr>
         <p:spPr>
           <a:xfrm>
-            <a:off x="2133601" y="152400"/>
+            <a:off x="546970" y="457200"/>
             <a:ext cx="6348413" cy="685800"/>
           </a:xfrm>
         </p:spPr>
@@ -18095,7 +17931,7 @@
         </p:nvSpPr>
         <p:spPr>
           <a:xfrm>
-            <a:off x="1855788" y="457200"/>
+            <a:off x="786644" y="457200"/>
             <a:ext cx="7772400" cy="762000"/>
           </a:xfrm>
         </p:spPr>
@@ -18105,7 +17941,7 @@
           <a:p>
             <a:pPr eaLnBrk="1" hangingPunct="1"/>
             <a:r>
-              <a:rPr lang="en-US" altLang="en-US" smtClean="0"/>
+              <a:rPr lang="en-US" altLang="en-US" dirty="0" smtClean="0"/>
               <a:t>CSMA/CD Protocol</a:t>
             </a:r>
           </a:p>
@@ -18123,8 +17959,8 @@
         </p:nvSpPr>
         <p:spPr>
           <a:xfrm>
-            <a:off x="1828800" y="1600200"/>
-            <a:ext cx="7772400" cy="5410200"/>
+            <a:off x="970671" y="1600200"/>
+            <a:ext cx="11015003" cy="5410200"/>
           </a:xfrm>
         </p:spPr>
         <p:txBody>
@@ -18133,7 +17969,7 @@
           <a:p>
             <a:pPr eaLnBrk="1" hangingPunct="1"/>
             <a:r>
-              <a:rPr lang="en-US" altLang="en-US" smtClean="0"/>
+              <a:rPr lang="en-US" altLang="en-US" dirty="0" smtClean="0"/>
               <a:t> Use one of the CSMA persistence algorithm</a:t>
             </a:r>
           </a:p>
@@ -18143,56 +17979,64 @@
               <a:buNone/>
             </a:pPr>
             <a:r>
-              <a:rPr lang="en-US" altLang="en-US" smtClean="0"/>
+              <a:rPr lang="en-US" altLang="en-US" dirty="0" smtClean="0"/>
               <a:t>(non-persistent, 1-persistent, p-persistent) for transmission</a:t>
             </a:r>
           </a:p>
           <a:p>
             <a:pPr eaLnBrk="1" hangingPunct="1"/>
             <a:r>
-              <a:rPr lang="en-US" altLang="en-US" smtClean="0"/>
+              <a:rPr lang="en-US" altLang="en-US" dirty="0" smtClean="0"/>
               <a:t>If a collision is detected by a station during its transmission then it should do the following:</a:t>
             </a:r>
           </a:p>
           <a:p>
             <a:pPr lvl="1" eaLnBrk="1" hangingPunct="1"/>
             <a:r>
-              <a:rPr lang="en-US" altLang="en-US" smtClean="0"/>
+              <a:rPr lang="en-US" altLang="en-US" dirty="0" smtClean="0"/>
               <a:t>Abort transmission and </a:t>
             </a:r>
           </a:p>
           <a:p>
             <a:pPr lvl="1" eaLnBrk="1" hangingPunct="1"/>
             <a:r>
-              <a:rPr lang="en-US" altLang="en-US" smtClean="0"/>
+              <a:rPr lang="en-US" altLang="en-US" dirty="0" smtClean="0"/>
               <a:t>Transmit a </a:t>
             </a:r>
             <a:r>
-              <a:rPr lang="en-US" altLang="en-US" b="1" smtClean="0"/>
+              <a:rPr lang="en-US" altLang="en-US" b="1" dirty="0" smtClean="0"/>
               <a:t>jam signal</a:t>
             </a:r>
             <a:r>
-              <a:rPr lang="en-US" altLang="en-US" smtClean="0"/>
+              <a:rPr lang="en-US" altLang="en-US" dirty="0" smtClean="0"/>
               <a:t> to notify other stations of collision so that they will discard the transmitted frame also to make sure that the collision signal will stay until detected by the furthest station</a:t>
             </a:r>
           </a:p>
           <a:p>
             <a:pPr lvl="1" eaLnBrk="1" hangingPunct="1"/>
             <a:r>
-              <a:rPr lang="en-US" altLang="en-US" smtClean="0"/>
-              <a:t>After sending the jam signal, backoff (wait) for a random amount of time, then</a:t>
+              <a:rPr lang="en-US" altLang="en-US" dirty="0" smtClean="0"/>
+              <a:t>After sending the jam signal, </a:t>
+            </a:r>
+            <a:r>
+              <a:rPr lang="en-US" altLang="en-US" dirty="0" err="1" smtClean="0"/>
+              <a:t>backoff</a:t>
+            </a:r>
+            <a:r>
+              <a:rPr lang="en-US" altLang="en-US" dirty="0" smtClean="0"/>
+              <a:t> (wait) for a random amount of time, then</a:t>
             </a:r>
           </a:p>
           <a:p>
             <a:pPr lvl="1" eaLnBrk="1" hangingPunct="1"/>
             <a:r>
-              <a:rPr lang="en-US" altLang="en-US" smtClean="0"/>
+              <a:rPr lang="en-US" altLang="en-US" dirty="0" smtClean="0"/>
               <a:t>Transmit the frame again</a:t>
             </a:r>
           </a:p>
           <a:p>
             <a:pPr eaLnBrk="1" hangingPunct="1"/>
-            <a:endParaRPr lang="en-US" altLang="en-US" smtClean="0"/>
+            <a:endParaRPr lang="en-US" altLang="en-US" dirty="0" smtClean="0"/>
           </a:p>
         </p:txBody>
       </p:sp>
@@ -18235,88 +18079,6 @@
       </p:grpSpPr>
       <p:sp>
         <p:nvSpPr>
-          <p:cNvPr id="24577" name="Line 2"/>
-          <p:cNvSpPr>
-            <a:spLocks noChangeShapeType="1"/>
-          </p:cNvSpPr>
-          <p:nvPr/>
-        </p:nvSpPr>
-        <p:spPr bwMode="auto">
-          <a:xfrm>
-            <a:off x="1676400" y="152400"/>
-            <a:ext cx="8763000" cy="0"/>
-          </a:xfrm>
-          <a:prstGeom prst="line">
-            <a:avLst/>
-          </a:prstGeom>
-          <a:noFill/>
-          <a:ln w="76200">
-            <a:solidFill>
-              <a:schemeClr val="hlink"/>
-            </a:solidFill>
-            <a:round/>
-            <a:headEnd/>
-            <a:tailEnd/>
-          </a:ln>
-          <a:extLst>
-            <a:ext uri="{909E8E84-426E-40DD-AFC4-6F175D3DCCD1}">
-              <a14:hiddenFill xmlns:a14="http://schemas.microsoft.com/office/drawing/2010/main">
-                <a:noFill/>
-              </a14:hiddenFill>
-            </a:ext>
-          </a:extLst>
-        </p:spPr>
-        <p:txBody>
-          <a:bodyPr/>
-          <a:lstStyle/>
-          <a:p>
-            <a:endParaRPr lang="en-US"/>
-          </a:p>
-        </p:txBody>
-      </p:sp>
-      <p:sp>
-        <p:nvSpPr>
-          <p:cNvPr id="24578" name="Line 3"/>
-          <p:cNvSpPr>
-            <a:spLocks noChangeShapeType="1"/>
-          </p:cNvSpPr>
-          <p:nvPr/>
-        </p:nvSpPr>
-        <p:spPr bwMode="auto">
-          <a:xfrm>
-            <a:off x="1676400" y="990600"/>
-            <a:ext cx="8763000" cy="0"/>
-          </a:xfrm>
-          <a:prstGeom prst="line">
-            <a:avLst/>
-          </a:prstGeom>
-          <a:noFill/>
-          <a:ln w="19050">
-            <a:solidFill>
-              <a:schemeClr val="hlink"/>
-            </a:solidFill>
-            <a:round/>
-            <a:headEnd/>
-            <a:tailEnd/>
-          </a:ln>
-          <a:extLst>
-            <a:ext uri="{909E8E84-426E-40DD-AFC4-6F175D3DCCD1}">
-              <a14:hiddenFill xmlns:a14="http://schemas.microsoft.com/office/drawing/2010/main">
-                <a:noFill/>
-              </a14:hiddenFill>
-            </a:ext>
-          </a:extLst>
-        </p:spPr>
-        <p:txBody>
-          <a:bodyPr/>
-          <a:lstStyle/>
-          <a:p>
-            <a:endParaRPr lang="en-US"/>
-          </a:p>
-        </p:txBody>
-      </p:sp>
-      <p:sp>
-        <p:nvSpPr>
           <p:cNvPr id="24579" name="Text Box 4"/>
           <p:cNvSpPr txBox="1">
             <a:spLocks noChangeArrowheads="1"/>
@@ -18554,47 +18316,6 @@
               </a:rPr>
               <a:t>Data link layer divided into two functionality-oriented sublayers</a:t>
             </a:r>
-          </a:p>
-        </p:txBody>
-      </p:sp>
-      <p:sp>
-        <p:nvSpPr>
-          <p:cNvPr id="24580" name="Line 5"/>
-          <p:cNvSpPr>
-            <a:spLocks noChangeShapeType="1"/>
-          </p:cNvSpPr>
-          <p:nvPr/>
-        </p:nvSpPr>
-        <p:spPr bwMode="auto">
-          <a:xfrm>
-            <a:off x="1676400" y="6248400"/>
-            <a:ext cx="8763000" cy="0"/>
-          </a:xfrm>
-          <a:prstGeom prst="line">
-            <a:avLst/>
-          </a:prstGeom>
-          <a:noFill/>
-          <a:ln w="76200">
-            <a:solidFill>
-              <a:schemeClr val="hlink"/>
-            </a:solidFill>
-            <a:round/>
-            <a:headEnd/>
-            <a:tailEnd/>
-          </a:ln>
-          <a:extLst>
-            <a:ext uri="{909E8E84-426E-40DD-AFC4-6F175D3DCCD1}">
-              <a14:hiddenFill xmlns:a14="http://schemas.microsoft.com/office/drawing/2010/main">
-                <a:noFill/>
-              </a14:hiddenFill>
-            </a:ext>
-          </a:extLst>
-        </p:spPr>
-        <p:txBody>
-          <a:bodyPr/>
-          <a:lstStyle/>
-          <a:p>
-            <a:endParaRPr lang="en-US"/>
           </a:p>
         </p:txBody>
       </p:sp>
@@ -19944,7 +19665,7 @@
         </p:nvSpPr>
         <p:spPr>
           <a:xfrm>
-            <a:off x="2209800" y="228600"/>
+            <a:off x="685800" y="228600"/>
             <a:ext cx="7772400" cy="762000"/>
           </a:xfrm>
         </p:spPr>
@@ -19954,7 +19675,7 @@
           <a:p>
             <a:pPr eaLnBrk="1" hangingPunct="1"/>
             <a:r>
-              <a:rPr lang="en-US" altLang="en-US" smtClean="0"/>
+              <a:rPr lang="en-US" altLang="en-US" dirty="0" smtClean="0"/>
               <a:t>CSMA/CD</a:t>
             </a:r>
           </a:p>
@@ -19972,7 +19693,7 @@
         </p:nvSpPr>
         <p:spPr>
           <a:xfrm>
-            <a:off x="2209800" y="1066800"/>
+            <a:off x="838200" y="990600"/>
             <a:ext cx="7772400" cy="4114800"/>
           </a:xfrm>
         </p:spPr>
@@ -19982,7 +19703,7 @@
           <a:p>
             <a:pPr eaLnBrk="1" hangingPunct="1"/>
             <a:r>
-              <a:rPr lang="en-US" altLang="en-US" sz="2000" b="1" i="1">
+              <a:rPr lang="en-US" altLang="en-US" sz="2000" b="1" i="1" dirty="0">
                 <a:solidFill>
                   <a:srgbClr val="3333CE"/>
                 </a:solidFill>
@@ -19991,7 +19712,7 @@
               <a:t>Question: </a:t>
             </a:r>
             <a:r>
-              <a:rPr lang="en-US" altLang="en-US" sz="2000">
+              <a:rPr lang="en-US" altLang="en-US" sz="2000" dirty="0">
                 <a:solidFill>
                   <a:srgbClr val="000000"/>
                 </a:solidFill>
@@ -20003,7 +19724,7 @@
           <a:p>
             <a:pPr eaLnBrk="1" hangingPunct="1"/>
             <a:r>
-              <a:rPr lang="en-US" altLang="en-US" sz="2000" b="1" i="1">
+              <a:rPr lang="en-US" altLang="en-US" sz="2000" b="1" i="1" dirty="0">
                 <a:solidFill>
                   <a:srgbClr val="3333CE"/>
                 </a:solidFill>
@@ -20012,7 +19733,7 @@
               <a:t>Answer: </a:t>
             </a:r>
             <a:r>
-              <a:rPr lang="en-US" altLang="en-US" sz="2000" i="1">
+              <a:rPr lang="en-US" altLang="en-US" sz="2000" i="1" dirty="0">
                 <a:solidFill>
                   <a:srgbClr val="000000"/>
                 </a:solidFill>
@@ -20021,7 +19742,7 @@
               <a:t>In the </a:t>
             </a:r>
             <a:r>
-              <a:rPr lang="en-US" altLang="en-US" sz="2000" b="1" i="1">
+              <a:rPr lang="en-US" altLang="en-US" sz="2000" b="1" i="1" dirty="0">
                 <a:solidFill>
                   <a:srgbClr val="000000"/>
                 </a:solidFill>
@@ -20030,7 +19751,7 @@
               <a:t>worst case</a:t>
             </a:r>
             <a:r>
-              <a:rPr lang="en-US" altLang="en-US" sz="2000">
+              <a:rPr lang="en-US" altLang="en-US" sz="2000" dirty="0">
                 <a:solidFill>
                   <a:srgbClr val="000000"/>
                 </a:solidFill>
@@ -20039,7 +19760,7 @@
               <a:t>, </a:t>
             </a:r>
             <a:r>
-              <a:rPr lang="en-US" altLang="en-US" sz="2000" b="1">
+              <a:rPr lang="en-US" altLang="en-US" sz="2000" b="1" dirty="0">
                 <a:solidFill>
                   <a:srgbClr val="000000"/>
                 </a:solidFill>
@@ -20050,7 +19771,7 @@
           </a:p>
           <a:p>
             <a:pPr eaLnBrk="1" hangingPunct="1"/>
-            <a:endParaRPr lang="en-US" altLang="en-US" sz="2000" b="1"/>
+            <a:endParaRPr lang="en-US" altLang="en-US" sz="2000" b="1" dirty="0"/>
           </a:p>
         </p:txBody>
       </p:sp>
@@ -20399,7 +20120,7 @@
         </p:nvSpPr>
         <p:spPr>
           <a:xfrm>
-            <a:off x="2057400" y="473075"/>
+            <a:off x="534573" y="304263"/>
             <a:ext cx="7772400" cy="1143000"/>
           </a:xfrm>
         </p:spPr>
@@ -20409,7 +20130,7 @@
           <a:p>
             <a:pPr eaLnBrk="1" hangingPunct="1"/>
             <a:r>
-              <a:rPr lang="en-US" altLang="en-US" smtClean="0"/>
+              <a:rPr lang="en-US" altLang="en-US" dirty="0" smtClean="0"/>
               <a:t>CSMA/CD</a:t>
             </a:r>
           </a:p>
@@ -20427,8 +20148,8 @@
         </p:nvSpPr>
         <p:spPr>
           <a:xfrm>
-            <a:off x="1752600" y="1600200"/>
-            <a:ext cx="7086600" cy="4114800"/>
+            <a:off x="534573" y="1600200"/>
+            <a:ext cx="11380762" cy="4114800"/>
           </a:xfrm>
         </p:spPr>
         <p:txBody>
@@ -20440,7 +20161,7 @@
               <a:buChar char="§"/>
             </a:pPr>
             <a:r>
-              <a:rPr lang="en-US" altLang="en-US" sz="2000"/>
+              <a:rPr lang="en-US" altLang="en-US" sz="2000" dirty="0"/>
               <a:t>Restrictions of CSMA / CD:</a:t>
             </a:r>
           </a:p>
@@ -20450,7 +20171,7 @@
               <a:buChar char="§"/>
             </a:pPr>
             <a:r>
-              <a:rPr lang="en-US" altLang="en-US" sz="1800"/>
+              <a:rPr lang="en-US" altLang="en-US" sz="1800" dirty="0"/>
               <a:t>Packet transmission time should be at least as long as the time needed to detect a collision (2 * maximum propagation delay + jam sequence transmission time)</a:t>
             </a:r>
           </a:p>
@@ -20460,7 +20181,7 @@
               <a:buChar char="§"/>
             </a:pPr>
             <a:r>
-              <a:rPr lang="en-US" altLang="en-US" sz="1800"/>
+              <a:rPr lang="en-US" altLang="en-US" sz="1800" dirty="0"/>
               <a:t>Otherwise, CSMA/CD does not have an advantage over CSMA</a:t>
             </a:r>
           </a:p>
@@ -20469,11 +20190,11 @@
               <a:buFont typeface="Wingdings" panose="05000000000000000000" pitchFamily="2" charset="2"/>
               <a:buChar char="§"/>
             </a:pPr>
-            <a:endParaRPr lang="en-US" altLang="en-US" sz="2000"/>
+            <a:endParaRPr lang="en-US" altLang="en-US" sz="2000" dirty="0"/>
           </a:p>
           <a:p>
             <a:pPr eaLnBrk="1" hangingPunct="1"/>
-            <a:endParaRPr lang="en-US" altLang="en-US" sz="2000"/>
+            <a:endParaRPr lang="en-US" altLang="en-US" sz="2000" dirty="0"/>
           </a:p>
         </p:txBody>
       </p:sp>
@@ -20629,7 +20350,7 @@
         </p:nvSpPr>
         <p:spPr>
           <a:xfrm>
-            <a:off x="2209800" y="609600"/>
+            <a:off x="492369" y="300110"/>
             <a:ext cx="6248400" cy="914400"/>
           </a:xfrm>
         </p:spPr>
@@ -20639,7 +20360,7 @@
           <a:p>
             <a:pPr eaLnBrk="1" hangingPunct="1"/>
             <a:r>
-              <a:rPr lang="en-US" altLang="en-US" sz="2800">
+              <a:rPr lang="en-US" altLang="en-US" sz="2800" dirty="0">
                 <a:cs typeface="Times New Roman" panose="02020603050405020304" pitchFamily="18" charset="0"/>
               </a:rPr>
               <a:t>Controlled Access or Scheduling</a:t>
@@ -20659,8 +20380,8 @@
         </p:nvSpPr>
         <p:spPr>
           <a:xfrm>
-            <a:off x="1752600" y="1555750"/>
-            <a:ext cx="7391400" cy="4114800"/>
+            <a:off x="492369" y="1555750"/>
+            <a:ext cx="11310425" cy="4114800"/>
           </a:xfrm>
         </p:spPr>
         <p:txBody>
@@ -20669,31 +20390,31 @@
           <a:p>
             <a:pPr eaLnBrk="1" hangingPunct="1"/>
             <a:r>
-              <a:rPr lang="en-US" altLang="en-US" sz="2400">
+              <a:rPr lang="en-US" altLang="en-US" sz="2400" dirty="0">
                 <a:cs typeface="Times New Roman" panose="02020603050405020304" pitchFamily="18" charset="0"/>
               </a:rPr>
               <a:t>Provides </a:t>
             </a:r>
             <a:r>
-              <a:rPr lang="en-US" altLang="en-US" sz="2400" b="1">
+              <a:rPr lang="en-US" altLang="en-US" sz="2400" b="1" dirty="0">
                 <a:cs typeface="Times New Roman" panose="02020603050405020304" pitchFamily="18" charset="0"/>
               </a:rPr>
               <a:t>in order access</a:t>
             </a:r>
             <a:r>
-              <a:rPr lang="en-US" altLang="en-US" sz="2400">
+              <a:rPr lang="en-US" altLang="en-US" sz="2400" dirty="0">
                 <a:cs typeface="Times New Roman" panose="02020603050405020304" pitchFamily="18" charset="0"/>
               </a:rPr>
               <a:t> to shared medium so that every station has chance to transfer (</a:t>
             </a:r>
             <a:r>
-              <a:rPr lang="en-US" altLang="en-US" sz="2400" b="1">
+              <a:rPr lang="en-US" altLang="en-US" sz="2400" b="1" dirty="0">
                 <a:cs typeface="Times New Roman" panose="02020603050405020304" pitchFamily="18" charset="0"/>
               </a:rPr>
               <a:t>fair protocol</a:t>
             </a:r>
             <a:r>
-              <a:rPr lang="en-US" altLang="en-US" sz="2400">
+              <a:rPr lang="en-US" altLang="en-US" sz="2400" dirty="0">
                 <a:cs typeface="Times New Roman" panose="02020603050405020304" pitchFamily="18" charset="0"/>
               </a:rPr>
               <a:t>)</a:t>
@@ -20701,26 +20422,20 @@
           </a:p>
           <a:p>
             <a:pPr eaLnBrk="1" hangingPunct="1"/>
-            <a:endParaRPr lang="en-US" altLang="en-US" sz="2400">
-              <a:cs typeface="Times New Roman" panose="02020603050405020304" pitchFamily="18" charset="0"/>
-            </a:endParaRPr>
-          </a:p>
-          <a:p>
-            <a:pPr eaLnBrk="1" hangingPunct="1"/>
-            <a:r>
-              <a:rPr lang="en-US" altLang="en-US" sz="2400" b="1" i="1">
+            <a:r>
+              <a:rPr lang="en-US" altLang="en-US" sz="2400" b="1" i="1" dirty="0" smtClean="0">
                 <a:cs typeface="Times New Roman" panose="02020603050405020304" pitchFamily="18" charset="0"/>
               </a:rPr>
               <a:t>Eliminates</a:t>
             </a:r>
             <a:r>
-              <a:rPr lang="en-US" altLang="en-US" sz="2400">
+              <a:rPr lang="en-US" altLang="en-US" sz="2400" dirty="0" smtClean="0">
                 <a:cs typeface="Times New Roman" panose="02020603050405020304" pitchFamily="18" charset="0"/>
               </a:rPr>
               <a:t> </a:t>
             </a:r>
             <a:r>
-              <a:rPr lang="en-US" altLang="en-US" sz="2400" u="sng">
+              <a:rPr lang="en-US" altLang="en-US" sz="2400" u="sng" dirty="0">
                 <a:cs typeface="Times New Roman" panose="02020603050405020304" pitchFamily="18" charset="0"/>
               </a:rPr>
               <a:t>collision completely</a:t>
@@ -20729,13 +20444,13 @@
           <a:p>
             <a:pPr eaLnBrk="1" hangingPunct="1"/>
             <a:r>
-              <a:rPr lang="en-US" altLang="en-US" sz="2400" b="1">
+              <a:rPr lang="en-US" altLang="en-US" sz="2400" b="1" dirty="0">
                 <a:cs typeface="Times New Roman" panose="02020603050405020304" pitchFamily="18" charset="0"/>
               </a:rPr>
               <a:t>Three methods</a:t>
             </a:r>
             <a:r>
-              <a:rPr lang="en-US" altLang="en-US" sz="2400">
+              <a:rPr lang="en-US" altLang="en-US" sz="2400" dirty="0">
                 <a:cs typeface="Times New Roman" panose="02020603050405020304" pitchFamily="18" charset="0"/>
               </a:rPr>
               <a:t> for controlled access:</a:t>
@@ -20744,7 +20459,7 @@
           <a:p>
             <a:pPr lvl="1" eaLnBrk="1" hangingPunct="1"/>
             <a:r>
-              <a:rPr lang="en-US" altLang="en-US" sz="1800">
+              <a:rPr lang="en-US" altLang="en-US" sz="1800" dirty="0">
                 <a:cs typeface="Times New Roman" panose="02020603050405020304" pitchFamily="18" charset="0"/>
               </a:rPr>
               <a:t>Reservation</a:t>
@@ -20753,7 +20468,7 @@
           <a:p>
             <a:pPr lvl="1" eaLnBrk="1" hangingPunct="1"/>
             <a:r>
-              <a:rPr lang="en-US" altLang="en-US" sz="1800">
+              <a:rPr lang="en-US" altLang="en-US" sz="1800" dirty="0">
                 <a:cs typeface="Times New Roman" panose="02020603050405020304" pitchFamily="18" charset="0"/>
               </a:rPr>
               <a:t>Polling</a:t>
@@ -20762,7 +20477,7 @@
           <a:p>
             <a:pPr lvl="1" eaLnBrk="1" hangingPunct="1"/>
             <a:r>
-              <a:rPr lang="en-US" altLang="en-US" sz="1800">
+              <a:rPr lang="en-US" altLang="en-US" sz="1800" dirty="0">
                 <a:cs typeface="Times New Roman" panose="02020603050405020304" pitchFamily="18" charset="0"/>
               </a:rPr>
               <a:t>Token Passing</a:t>
@@ -21232,7 +20947,7 @@
         </p:nvSpPr>
         <p:spPr>
           <a:xfrm>
-            <a:off x="2209800" y="228600"/>
+            <a:off x="395067" y="0"/>
             <a:ext cx="7772400" cy="762000"/>
           </a:xfrm>
         </p:spPr>
@@ -21268,14 +20983,14 @@
         </p:nvSpPr>
         <p:spPr>
           <a:xfrm>
-            <a:off x="1676400" y="762000"/>
-            <a:ext cx="7924800" cy="5638800"/>
+            <a:off x="295421" y="762000"/>
+            <a:ext cx="11563643" cy="5638800"/>
           </a:xfrm>
           <a:extLst/>
         </p:spPr>
         <p:txBody>
           <a:bodyPr rtlCol="0">
-            <a:normAutofit fontScale="92500" lnSpcReduction="20000"/>
+            <a:normAutofit/>
           </a:bodyPr>
           <a:lstStyle/>
           <a:p>
@@ -21896,88 +21611,6 @@
       </p:grpSpPr>
       <p:sp>
         <p:nvSpPr>
-          <p:cNvPr id="55297" name="Line 2"/>
-          <p:cNvSpPr>
-            <a:spLocks noChangeShapeType="1"/>
-          </p:cNvSpPr>
-          <p:nvPr/>
-        </p:nvSpPr>
-        <p:spPr bwMode="auto">
-          <a:xfrm>
-            <a:off x="1676400" y="152400"/>
-            <a:ext cx="8763000" cy="0"/>
-          </a:xfrm>
-          <a:prstGeom prst="line">
-            <a:avLst/>
-          </a:prstGeom>
-          <a:noFill/>
-          <a:ln w="76200">
-            <a:solidFill>
-              <a:schemeClr val="hlink"/>
-            </a:solidFill>
-            <a:round/>
-            <a:headEnd/>
-            <a:tailEnd/>
-          </a:ln>
-          <a:extLst>
-            <a:ext uri="{909E8E84-426E-40DD-AFC4-6F175D3DCCD1}">
-              <a14:hiddenFill xmlns:a14="http://schemas.microsoft.com/office/drawing/2010/main">
-                <a:noFill/>
-              </a14:hiddenFill>
-            </a:ext>
-          </a:extLst>
-        </p:spPr>
-        <p:txBody>
-          <a:bodyPr/>
-          <a:lstStyle/>
-          <a:p>
-            <a:endParaRPr lang="en-US"/>
-          </a:p>
-        </p:txBody>
-      </p:sp>
-      <p:sp>
-        <p:nvSpPr>
-          <p:cNvPr id="55298" name="Line 3"/>
-          <p:cNvSpPr>
-            <a:spLocks noChangeShapeType="1"/>
-          </p:cNvSpPr>
-          <p:nvPr/>
-        </p:nvSpPr>
-        <p:spPr bwMode="auto">
-          <a:xfrm>
-            <a:off x="1676400" y="990600"/>
-            <a:ext cx="8763000" cy="0"/>
-          </a:xfrm>
-          <a:prstGeom prst="line">
-            <a:avLst/>
-          </a:prstGeom>
-          <a:noFill/>
-          <a:ln w="19050">
-            <a:solidFill>
-              <a:schemeClr val="hlink"/>
-            </a:solidFill>
-            <a:round/>
-            <a:headEnd/>
-            <a:tailEnd/>
-          </a:ln>
-          <a:extLst>
-            <a:ext uri="{909E8E84-426E-40DD-AFC4-6F175D3DCCD1}">
-              <a14:hiddenFill xmlns:a14="http://schemas.microsoft.com/office/drawing/2010/main">
-                <a:noFill/>
-              </a14:hiddenFill>
-            </a:ext>
-          </a:extLst>
-        </p:spPr>
-        <p:txBody>
-          <a:bodyPr/>
-          <a:lstStyle/>
-          <a:p>
-            <a:endParaRPr lang="en-US"/>
-          </a:p>
-        </p:txBody>
-      </p:sp>
-      <p:sp>
-        <p:nvSpPr>
           <p:cNvPr id="55299" name="Text Box 4"/>
           <p:cNvSpPr txBox="1">
             <a:spLocks noChangeArrowheads="1"/>
@@ -22206,47 +21839,6 @@
               </a:rPr>
               <a:t>Select and poll functions in polling access method</a:t>
             </a:r>
-          </a:p>
-        </p:txBody>
-      </p:sp>
-      <p:sp>
-        <p:nvSpPr>
-          <p:cNvPr id="55300" name="Line 5"/>
-          <p:cNvSpPr>
-            <a:spLocks noChangeShapeType="1"/>
-          </p:cNvSpPr>
-          <p:nvPr/>
-        </p:nvSpPr>
-        <p:spPr bwMode="auto">
-          <a:xfrm>
-            <a:off x="1676400" y="6248400"/>
-            <a:ext cx="8763000" cy="0"/>
-          </a:xfrm>
-          <a:prstGeom prst="line">
-            <a:avLst/>
-          </a:prstGeom>
-          <a:noFill/>
-          <a:ln w="76200">
-            <a:solidFill>
-              <a:schemeClr val="hlink"/>
-            </a:solidFill>
-            <a:round/>
-            <a:headEnd/>
-            <a:tailEnd/>
-          </a:ln>
-          <a:extLst>
-            <a:ext uri="{909E8E84-426E-40DD-AFC4-6F175D3DCCD1}">
-              <a14:hiddenFill xmlns:a14="http://schemas.microsoft.com/office/drawing/2010/main">
-                <a:noFill/>
-              </a14:hiddenFill>
-            </a:ext>
-          </a:extLst>
-        </p:spPr>
-        <p:txBody>
-          <a:bodyPr/>
-          <a:lstStyle/>
-          <a:p>
-            <a:endParaRPr lang="en-US"/>
           </a:p>
         </p:txBody>
       </p:sp>
@@ -22823,7 +22415,7 @@
         </p:nvSpPr>
         <p:spPr bwMode="auto">
           <a:xfrm>
-            <a:off x="1828800" y="228601"/>
+            <a:off x="450166" y="439616"/>
             <a:ext cx="5715000" cy="461963"/>
           </a:xfrm>
           <a:prstGeom prst="rect">
@@ -22990,8 +22582,8 @@
         </p:nvSpPr>
         <p:spPr bwMode="auto">
           <a:xfrm>
-            <a:off x="1676400" y="1219200"/>
-            <a:ext cx="7696200" cy="2565400"/>
+            <a:off x="450165" y="1219200"/>
+            <a:ext cx="11197883" cy="2031325"/>
           </a:xfrm>
           <a:prstGeom prst="rect">
             <a:avLst/>
@@ -23021,7 +22613,7 @@
           </a:extLst>
         </p:spPr>
         <p:txBody>
-          <a:bodyPr>
+          <a:bodyPr wrap="square">
             <a:spAutoFit/>
           </a:bodyPr>
           <a:lstStyle>
@@ -23202,7 +22794,7 @@
               <a:buChar char="§"/>
             </a:pPr>
             <a:r>
-              <a:rPr lang="en-US" altLang="en-US" b="1">
+              <a:rPr lang="en-US" altLang="en-US" b="1" dirty="0">
                 <a:solidFill>
                   <a:schemeClr val="tx1"/>
                 </a:solidFill>
@@ -23211,7 +22803,7 @@
               <a:t>Station Interface is in two states</a:t>
             </a:r>
             <a:r>
-              <a:rPr lang="en-US" altLang="en-US">
+              <a:rPr lang="en-US" altLang="en-US" dirty="0">
                 <a:solidFill>
                   <a:schemeClr val="tx1"/>
                 </a:solidFill>
@@ -23231,7 +22823,7 @@
               <a:buChar char="§"/>
             </a:pPr>
             <a:r>
-              <a:rPr lang="en-US" altLang="en-US" sz="1800" b="1">
+              <a:rPr lang="en-US" altLang="en-US" sz="1800" b="1" dirty="0">
                 <a:solidFill>
                   <a:schemeClr val="tx1"/>
                 </a:solidFill>
@@ -23240,7 +22832,7 @@
               <a:t>Listen state</a:t>
             </a:r>
             <a:r>
-              <a:rPr lang="en-US" altLang="en-US" sz="1800">
+              <a:rPr lang="en-US" altLang="en-US" sz="1800" dirty="0">
                 <a:solidFill>
                   <a:schemeClr val="tx1"/>
                 </a:solidFill>
@@ -23260,7 +22852,7 @@
               <a:buChar char="§"/>
             </a:pPr>
             <a:r>
-              <a:rPr lang="en-US" altLang="en-US" sz="1800" b="1">
+              <a:rPr lang="en-US" altLang="en-US" sz="1800" b="1" dirty="0">
                 <a:solidFill>
                   <a:schemeClr val="tx1"/>
                 </a:solidFill>
@@ -23269,7 +22861,7 @@
               <a:t>Transmit state</a:t>
             </a:r>
             <a:r>
-              <a:rPr lang="en-US" altLang="en-US" sz="1800">
+              <a:rPr lang="en-US" altLang="en-US" sz="1800" dirty="0">
                 <a:solidFill>
                   <a:schemeClr val="tx1"/>
                 </a:solidFill>
@@ -23278,7 +22870,7 @@
               <a:t>: station captures a special frame called  </a:t>
             </a:r>
             <a:r>
-              <a:rPr lang="en-US" altLang="en-US" sz="1800" b="1">
+              <a:rPr lang="en-US" altLang="en-US" sz="1800" b="1" dirty="0">
                 <a:solidFill>
                   <a:schemeClr val="tx1"/>
                 </a:solidFill>
@@ -23287,7 +22879,7 @@
               <a:t>free token</a:t>
             </a:r>
             <a:r>
-              <a:rPr lang="en-US" altLang="en-US" sz="1800">
+              <a:rPr lang="en-US" altLang="en-US" sz="1800" dirty="0">
                 <a:solidFill>
                   <a:schemeClr val="tx1"/>
                 </a:solidFill>
@@ -23296,7 +22888,7 @@
               <a:t> and transmits its frames. </a:t>
             </a:r>
             <a:r>
-              <a:rPr lang="en-US" altLang="en-US" sz="1800" b="1">
+              <a:rPr lang="en-US" altLang="en-US" sz="1800" b="1" dirty="0">
                 <a:solidFill>
                   <a:schemeClr val="tx1"/>
                 </a:solidFill>
@@ -23305,7 +22897,7 @@
               <a:t>Sending </a:t>
             </a:r>
             <a:r>
-              <a:rPr lang="en-US" altLang="en-US" sz="1800">
+              <a:rPr lang="en-US" altLang="en-US" sz="1800" dirty="0">
                 <a:solidFill>
                   <a:schemeClr val="tx1"/>
                 </a:solidFill>
@@ -23314,7 +22906,7 @@
               <a:t>station is responsible for </a:t>
             </a:r>
             <a:r>
-              <a:rPr lang="en-US" altLang="en-US" sz="1800" b="1">
+              <a:rPr lang="en-US" altLang="en-US" sz="1800" b="1" dirty="0">
                 <a:solidFill>
                   <a:schemeClr val="tx1"/>
                 </a:solidFill>
@@ -23323,7 +22915,7 @@
               <a:t>reinserting </a:t>
             </a:r>
             <a:r>
-              <a:rPr lang="en-US" altLang="en-US" sz="1800">
+              <a:rPr lang="en-US" altLang="en-US" sz="1800" dirty="0">
                 <a:solidFill>
                   <a:schemeClr val="tx1"/>
                 </a:solidFill>
@@ -23332,7 +22924,7 @@
               <a:t>the free token into the ring medium and for </a:t>
             </a:r>
             <a:r>
-              <a:rPr lang="en-US" altLang="en-US" sz="1800" b="1">
+              <a:rPr lang="en-US" altLang="en-US" sz="1800" b="1" dirty="0">
                 <a:solidFill>
                   <a:schemeClr val="tx1"/>
                 </a:solidFill>
@@ -23341,7 +22933,7 @@
               <a:t>removing </a:t>
             </a:r>
             <a:r>
-              <a:rPr lang="en-US" altLang="en-US" sz="1800">
+              <a:rPr lang="en-US" altLang="en-US" sz="1800" dirty="0">
                 <a:solidFill>
                   <a:schemeClr val="tx1"/>
                 </a:solidFill>
@@ -23504,7 +23096,7 @@
         </p:nvSpPr>
         <p:spPr bwMode="auto">
           <a:xfrm>
-            <a:off x="1752600" y="406401"/>
+            <a:off x="739726" y="490807"/>
             <a:ext cx="5867400" cy="646113"/>
           </a:xfrm>
           <a:prstGeom prst="rect">
@@ -23786,8 +23378,8 @@
         </p:nvSpPr>
         <p:spPr bwMode="auto">
           <a:xfrm>
-            <a:off x="1736725" y="1740605"/>
-            <a:ext cx="7086600" cy="1200329"/>
+            <a:off x="739726" y="2017603"/>
+            <a:ext cx="10922391" cy="646331"/>
           </a:xfrm>
           <a:prstGeom prst="rect">
             <a:avLst/>
@@ -23802,7 +23394,7 @@
           <a:effectLst/>
         </p:spPr>
         <p:txBody>
-          <a:bodyPr anchor="ctr">
+          <a:bodyPr wrap="square" anchor="ctr">
             <a:spAutoFit/>
           </a:bodyPr>
           <a:lstStyle/>
@@ -23902,8 +23494,8 @@
         </p:nvSpPr>
         <p:spPr>
           <a:xfrm>
-            <a:off x="1828800" y="914400"/>
-            <a:ext cx="7772400" cy="5105400"/>
+            <a:off x="844063" y="914400"/>
+            <a:ext cx="10803986" cy="5105400"/>
           </a:xfrm>
           <a:extLst/>
         </p:spPr>
@@ -24493,88 +24085,6 @@
       </p:grpSpPr>
       <p:sp>
         <p:nvSpPr>
-          <p:cNvPr id="60417" name="Line 2"/>
-          <p:cNvSpPr>
-            <a:spLocks noChangeShapeType="1"/>
-          </p:cNvSpPr>
-          <p:nvPr/>
-        </p:nvSpPr>
-        <p:spPr bwMode="auto">
-          <a:xfrm>
-            <a:off x="1676400" y="152400"/>
-            <a:ext cx="8763000" cy="0"/>
-          </a:xfrm>
-          <a:prstGeom prst="line">
-            <a:avLst/>
-          </a:prstGeom>
-          <a:noFill/>
-          <a:ln w="76200">
-            <a:solidFill>
-              <a:schemeClr val="hlink"/>
-            </a:solidFill>
-            <a:round/>
-            <a:headEnd/>
-            <a:tailEnd/>
-          </a:ln>
-          <a:extLst>
-            <a:ext uri="{909E8E84-426E-40DD-AFC4-6F175D3DCCD1}">
-              <a14:hiddenFill xmlns:a14="http://schemas.microsoft.com/office/drawing/2010/main">
-                <a:noFill/>
-              </a14:hiddenFill>
-            </a:ext>
-          </a:extLst>
-        </p:spPr>
-        <p:txBody>
-          <a:bodyPr/>
-          <a:lstStyle/>
-          <a:p>
-            <a:endParaRPr lang="en-US"/>
-          </a:p>
-        </p:txBody>
-      </p:sp>
-      <p:sp>
-        <p:nvSpPr>
-          <p:cNvPr id="60418" name="Line 3"/>
-          <p:cNvSpPr>
-            <a:spLocks noChangeShapeType="1"/>
-          </p:cNvSpPr>
-          <p:nvPr/>
-        </p:nvSpPr>
-        <p:spPr bwMode="auto">
-          <a:xfrm>
-            <a:off x="1676400" y="990600"/>
-            <a:ext cx="8763000" cy="0"/>
-          </a:xfrm>
-          <a:prstGeom prst="line">
-            <a:avLst/>
-          </a:prstGeom>
-          <a:noFill/>
-          <a:ln w="19050">
-            <a:solidFill>
-              <a:schemeClr val="hlink"/>
-            </a:solidFill>
-            <a:round/>
-            <a:headEnd/>
-            <a:tailEnd/>
-          </a:ln>
-          <a:extLst>
-            <a:ext uri="{909E8E84-426E-40DD-AFC4-6F175D3DCCD1}">
-              <a14:hiddenFill xmlns:a14="http://schemas.microsoft.com/office/drawing/2010/main">
-                <a:noFill/>
-              </a14:hiddenFill>
-            </a:ext>
-          </a:extLst>
-        </p:spPr>
-        <p:txBody>
-          <a:bodyPr/>
-          <a:lstStyle/>
-          <a:p>
-            <a:endParaRPr lang="en-US"/>
-          </a:p>
-        </p:txBody>
-      </p:sp>
-      <p:sp>
-        <p:nvSpPr>
           <p:cNvPr id="60419" name="Text Box 4"/>
           <p:cNvSpPr txBox="1">
             <a:spLocks noChangeArrowheads="1"/>
@@ -24803,47 +24313,6 @@
               </a:rPr>
               <a:t>Frequency-division multiple access (FDMA)</a:t>
             </a:r>
-          </a:p>
-        </p:txBody>
-      </p:sp>
-      <p:sp>
-        <p:nvSpPr>
-          <p:cNvPr id="60420" name="Line 5"/>
-          <p:cNvSpPr>
-            <a:spLocks noChangeShapeType="1"/>
-          </p:cNvSpPr>
-          <p:nvPr/>
-        </p:nvSpPr>
-        <p:spPr bwMode="auto">
-          <a:xfrm>
-            <a:off x="1676400" y="6248400"/>
-            <a:ext cx="8763000" cy="0"/>
-          </a:xfrm>
-          <a:prstGeom prst="line">
-            <a:avLst/>
-          </a:prstGeom>
-          <a:noFill/>
-          <a:ln w="76200">
-            <a:solidFill>
-              <a:schemeClr val="hlink"/>
-            </a:solidFill>
-            <a:round/>
-            <a:headEnd/>
-            <a:tailEnd/>
-          </a:ln>
-          <a:extLst>
-            <a:ext uri="{909E8E84-426E-40DD-AFC4-6F175D3DCCD1}">
-              <a14:hiddenFill xmlns:a14="http://schemas.microsoft.com/office/drawing/2010/main">
-                <a:noFill/>
-              </a14:hiddenFill>
-            </a:ext>
-          </a:extLst>
-        </p:spPr>
-        <p:txBody>
-          <a:bodyPr/>
-          <a:lstStyle/>
-          <a:p>
-            <a:endParaRPr lang="en-US"/>
           </a:p>
         </p:txBody>
       </p:sp>
@@ -25117,88 +24586,6 @@
       </p:grpSpPr>
       <p:sp>
         <p:nvSpPr>
-          <p:cNvPr id="63489" name="Line 2"/>
-          <p:cNvSpPr>
-            <a:spLocks noChangeShapeType="1"/>
-          </p:cNvSpPr>
-          <p:nvPr/>
-        </p:nvSpPr>
-        <p:spPr bwMode="auto">
-          <a:xfrm>
-            <a:off x="1676400" y="152400"/>
-            <a:ext cx="8763000" cy="0"/>
-          </a:xfrm>
-          <a:prstGeom prst="line">
-            <a:avLst/>
-          </a:prstGeom>
-          <a:noFill/>
-          <a:ln w="76200">
-            <a:solidFill>
-              <a:schemeClr val="hlink"/>
-            </a:solidFill>
-            <a:round/>
-            <a:headEnd/>
-            <a:tailEnd/>
-          </a:ln>
-          <a:extLst>
-            <a:ext uri="{909E8E84-426E-40DD-AFC4-6F175D3DCCD1}">
-              <a14:hiddenFill xmlns:a14="http://schemas.microsoft.com/office/drawing/2010/main">
-                <a:noFill/>
-              </a14:hiddenFill>
-            </a:ext>
-          </a:extLst>
-        </p:spPr>
-        <p:txBody>
-          <a:bodyPr/>
-          <a:lstStyle/>
-          <a:p>
-            <a:endParaRPr lang="en-US"/>
-          </a:p>
-        </p:txBody>
-      </p:sp>
-      <p:sp>
-        <p:nvSpPr>
-          <p:cNvPr id="63490" name="Line 3"/>
-          <p:cNvSpPr>
-            <a:spLocks noChangeShapeType="1"/>
-          </p:cNvSpPr>
-          <p:nvPr/>
-        </p:nvSpPr>
-        <p:spPr bwMode="auto">
-          <a:xfrm>
-            <a:off x="1676400" y="990600"/>
-            <a:ext cx="8763000" cy="0"/>
-          </a:xfrm>
-          <a:prstGeom prst="line">
-            <a:avLst/>
-          </a:prstGeom>
-          <a:noFill/>
-          <a:ln w="19050">
-            <a:solidFill>
-              <a:schemeClr val="hlink"/>
-            </a:solidFill>
-            <a:round/>
-            <a:headEnd/>
-            <a:tailEnd/>
-          </a:ln>
-          <a:extLst>
-            <a:ext uri="{909E8E84-426E-40DD-AFC4-6F175D3DCCD1}">
-              <a14:hiddenFill xmlns:a14="http://schemas.microsoft.com/office/drawing/2010/main">
-                <a:noFill/>
-              </a14:hiddenFill>
-            </a:ext>
-          </a:extLst>
-        </p:spPr>
-        <p:txBody>
-          <a:bodyPr/>
-          <a:lstStyle/>
-          <a:p>
-            <a:endParaRPr lang="en-US"/>
-          </a:p>
-        </p:txBody>
-      </p:sp>
-      <p:sp>
-        <p:nvSpPr>
           <p:cNvPr id="63491" name="Text Box 4"/>
           <p:cNvSpPr txBox="1">
             <a:spLocks noChangeArrowheads="1"/>
@@ -25427,47 +24814,6 @@
               </a:rPr>
               <a:t>Time-division multiple access (TDMA)</a:t>
             </a:r>
-          </a:p>
-        </p:txBody>
-      </p:sp>
-      <p:sp>
-        <p:nvSpPr>
-          <p:cNvPr id="63492" name="Line 5"/>
-          <p:cNvSpPr>
-            <a:spLocks noChangeShapeType="1"/>
-          </p:cNvSpPr>
-          <p:nvPr/>
-        </p:nvSpPr>
-        <p:spPr bwMode="auto">
-          <a:xfrm>
-            <a:off x="1676400" y="6248400"/>
-            <a:ext cx="8763000" cy="0"/>
-          </a:xfrm>
-          <a:prstGeom prst="line">
-            <a:avLst/>
-          </a:prstGeom>
-          <a:noFill/>
-          <a:ln w="76200">
-            <a:solidFill>
-              <a:schemeClr val="hlink"/>
-            </a:solidFill>
-            <a:round/>
-            <a:headEnd/>
-            <a:tailEnd/>
-          </a:ln>
-          <a:extLst>
-            <a:ext uri="{909E8E84-426E-40DD-AFC4-6F175D3DCCD1}">
-              <a14:hiddenFill xmlns:a14="http://schemas.microsoft.com/office/drawing/2010/main">
-                <a:noFill/>
-              </a14:hiddenFill>
-            </a:ext>
-          </a:extLst>
-        </p:spPr>
-        <p:txBody>
-          <a:bodyPr/>
-          <a:lstStyle/>
-          <a:p>
-            <a:endParaRPr lang="en-US"/>
           </a:p>
         </p:txBody>
       </p:sp>
@@ -25579,7 +24925,7 @@
           <a:p>
             <a:pPr eaLnBrk="1" hangingPunct="1"/>
             <a:r>
-              <a:rPr lang="en-US" altLang="en-US" sz="2000" b="1">
+              <a:rPr lang="en-US" altLang="en-US" sz="2000" b="1" dirty="0">
                 <a:latin typeface="Times New Roman" panose="02020603050405020304" pitchFamily="18" charset="0"/>
                 <a:cs typeface="Times New Roman" panose="02020603050405020304" pitchFamily="18" charset="0"/>
               </a:rPr>
@@ -25589,49 +24935,49 @@
           <a:p>
             <a:pPr lvl="1" eaLnBrk="1" hangingPunct="1"/>
             <a:r>
-              <a:rPr lang="en-US" altLang="en-US" sz="1800">
+              <a:rPr lang="en-US" altLang="en-US" sz="1800" dirty="0">
                 <a:latin typeface="Times New Roman" panose="02020603050405020304" pitchFamily="18" charset="0"/>
                 <a:cs typeface="Times New Roman" panose="02020603050405020304" pitchFamily="18" charset="0"/>
               </a:rPr>
               <a:t>The entire bandwidth capacity is a </a:t>
             </a:r>
             <a:r>
-              <a:rPr lang="en-US" altLang="en-US" sz="1800" b="1">
+              <a:rPr lang="en-US" altLang="en-US" sz="1800" b="1" dirty="0">
                 <a:latin typeface="Times New Roman" panose="02020603050405020304" pitchFamily="18" charset="0"/>
                 <a:cs typeface="Times New Roman" panose="02020603050405020304" pitchFamily="18" charset="0"/>
               </a:rPr>
               <a:t>single channel</a:t>
             </a:r>
             <a:r>
-              <a:rPr lang="en-US" altLang="en-US" sz="1800">
+              <a:rPr lang="en-US" altLang="en-US" sz="1800" dirty="0">
                 <a:latin typeface="Times New Roman" panose="02020603050405020304" pitchFamily="18" charset="0"/>
                 <a:cs typeface="Times New Roman" panose="02020603050405020304" pitchFamily="18" charset="0"/>
               </a:rPr>
               <a:t> with its capacity shared </a:t>
             </a:r>
             <a:r>
-              <a:rPr lang="en-US" altLang="en-US" sz="1800" b="1">
+              <a:rPr lang="en-US" altLang="en-US" sz="1800" b="1" dirty="0">
                 <a:latin typeface="Times New Roman" panose="02020603050405020304" pitchFamily="18" charset="0"/>
                 <a:cs typeface="Times New Roman" panose="02020603050405020304" pitchFamily="18" charset="0"/>
               </a:rPr>
               <a:t>in time</a:t>
             </a:r>
             <a:r>
-              <a:rPr lang="en-US" altLang="en-US" sz="1800">
+              <a:rPr lang="en-US" altLang="en-US" sz="1800" dirty="0">
                 <a:latin typeface="Times New Roman" panose="02020603050405020304" pitchFamily="18" charset="0"/>
                 <a:cs typeface="Times New Roman" panose="02020603050405020304" pitchFamily="18" charset="0"/>
               </a:rPr>
               <a:t> between </a:t>
             </a:r>
             <a:r>
-              <a:rPr lang="en-US" altLang="en-US" sz="1800" b="1">
+              <a:rPr lang="en-US" altLang="en-US" sz="1800" b="1" dirty="0">
                 <a:latin typeface="Times New Roman" panose="02020603050405020304" pitchFamily="18" charset="0"/>
                 <a:cs typeface="Times New Roman" panose="02020603050405020304" pitchFamily="18" charset="0"/>
               </a:rPr>
               <a:t>M</a:t>
             </a:r>
             <a:r>
-              <a:rPr lang="en-US" altLang="en-US" sz="1800">
+              <a:rPr lang="en-US" altLang="en-US" sz="1800" dirty="0">
                 <a:latin typeface="Times New Roman" panose="02020603050405020304" pitchFamily="18" charset="0"/>
                 <a:cs typeface="Times New Roman" panose="02020603050405020304" pitchFamily="18" charset="0"/>
               </a:rPr>
@@ -25641,35 +24987,35 @@
           <a:p>
             <a:pPr lvl="1" eaLnBrk="1" hangingPunct="1"/>
             <a:r>
-              <a:rPr lang="en-US" altLang="en-US" sz="1800">
+              <a:rPr lang="en-US" altLang="en-US" sz="1800" dirty="0">
                 <a:latin typeface="Times New Roman" panose="02020603050405020304" pitchFamily="18" charset="0"/>
                 <a:cs typeface="Times New Roman" panose="02020603050405020304" pitchFamily="18" charset="0"/>
               </a:rPr>
               <a:t>A node must </a:t>
             </a:r>
             <a:r>
-              <a:rPr lang="en-US" altLang="en-US" sz="1800" b="1">
+              <a:rPr lang="en-US" altLang="en-US" sz="1800" b="1" dirty="0">
                 <a:latin typeface="Times New Roman" panose="02020603050405020304" pitchFamily="18" charset="0"/>
                 <a:cs typeface="Times New Roman" panose="02020603050405020304" pitchFamily="18" charset="0"/>
               </a:rPr>
               <a:t>always wait for its turn</a:t>
             </a:r>
             <a:r>
-              <a:rPr lang="en-US" altLang="en-US" sz="1800">
+              <a:rPr lang="en-US" altLang="en-US" sz="1800" dirty="0">
                 <a:latin typeface="Times New Roman" panose="02020603050405020304" pitchFamily="18" charset="0"/>
                 <a:cs typeface="Times New Roman" panose="02020603050405020304" pitchFamily="18" charset="0"/>
               </a:rPr>
               <a:t> until its slot time arrives even when it is the </a:t>
             </a:r>
             <a:r>
-              <a:rPr lang="en-US" altLang="en-US" sz="1800" b="1">
+              <a:rPr lang="en-US" altLang="en-US" sz="1800" b="1" dirty="0">
                 <a:latin typeface="Times New Roman" panose="02020603050405020304" pitchFamily="18" charset="0"/>
                 <a:cs typeface="Times New Roman" panose="02020603050405020304" pitchFamily="18" charset="0"/>
               </a:rPr>
               <a:t>only node</a:t>
             </a:r>
             <a:r>
-              <a:rPr lang="en-US" altLang="en-US" sz="1800">
+              <a:rPr lang="en-US" altLang="en-US" sz="1800" dirty="0">
                 <a:latin typeface="Times New Roman" panose="02020603050405020304" pitchFamily="18" charset="0"/>
                 <a:cs typeface="Times New Roman" panose="02020603050405020304" pitchFamily="18" charset="0"/>
               </a:rPr>
@@ -25678,7 +25024,7 @@
           </a:p>
           <a:p>
             <a:pPr eaLnBrk="1" hangingPunct="1"/>
-            <a:endParaRPr lang="en-US" altLang="en-US" smtClean="0"/>
+            <a:endParaRPr lang="en-US" altLang="en-US" dirty="0" smtClean="0"/>
           </a:p>
         </p:txBody>
       </p:sp>
@@ -27069,8 +26415,8 @@
         </p:nvSpPr>
         <p:spPr>
           <a:xfrm>
-            <a:off x="2133601" y="1676400"/>
-            <a:ext cx="6348413" cy="3881438"/>
+            <a:off x="1125415" y="1676400"/>
+            <a:ext cx="10623762" cy="3881438"/>
           </a:xfrm>
         </p:spPr>
         <p:txBody>
@@ -27078,32 +26424,32 @@
           <a:lstStyle/>
           <a:p>
             <a:r>
-              <a:rPr lang="en-GB" altLang="en-US" b="1" smtClean="0"/>
+              <a:rPr lang="en-GB" altLang="en-US" b="1" dirty="0" smtClean="0"/>
               <a:t>Throughput:</a:t>
             </a:r>
             <a:r>
-              <a:rPr lang="en-GB" altLang="en-US" smtClean="0"/>
+              <a:rPr lang="en-GB" altLang="en-US" dirty="0" smtClean="0"/>
               <a:t> is the amount of data moved successfully from one place to another in a given time period.</a:t>
             </a:r>
           </a:p>
           <a:p>
             <a:r>
-              <a:rPr lang="en-GB" altLang="en-US" b="1" smtClean="0"/>
+              <a:rPr lang="en-GB" altLang="en-US" b="1" dirty="0" smtClean="0"/>
               <a:t>propagation</a:t>
             </a:r>
             <a:r>
-              <a:rPr lang="en-GB" altLang="en-US" smtClean="0"/>
+              <a:rPr lang="en-GB" altLang="en-US" dirty="0" smtClean="0"/>
               <a:t> </a:t>
             </a:r>
             <a:r>
-              <a:rPr lang="en-GB" altLang="en-US" b="1" smtClean="0"/>
+              <a:rPr lang="en-GB" altLang="en-US" b="1" dirty="0" smtClean="0"/>
               <a:t>delay:</a:t>
             </a:r>
             <a:r>
-              <a:rPr lang="en-GB" altLang="en-US" smtClean="0"/>
+              <a:rPr lang="en-GB" altLang="en-US" dirty="0" smtClean="0"/>
               <a:t> is the amount of time it takes for the head of the signal to travel from the sender to the receiver.</a:t>
             </a:r>
-            <a:endParaRPr lang="en-US" altLang="en-US" smtClean="0"/>
+            <a:endParaRPr lang="en-US" altLang="en-US" dirty="0" smtClean="0"/>
           </a:p>
         </p:txBody>
       </p:sp>
@@ -27247,8 +26593,8 @@
         </p:nvSpPr>
         <p:spPr>
           <a:xfrm>
-            <a:off x="2514600" y="889845"/>
-            <a:ext cx="7391400" cy="4247317"/>
+            <a:off x="633045" y="889845"/>
+            <a:ext cx="11029071" cy="3139321"/>
           </a:xfrm>
           <a:prstGeom prst="rect">
             <a:avLst/>
@@ -28309,129 +27655,6 @@
           <a:chExt cx="0" cy="0"/>
         </a:xfrm>
       </p:grpSpPr>
-      <p:sp>
-        <p:nvSpPr>
-          <p:cNvPr id="27649" name="Line 2"/>
-          <p:cNvSpPr>
-            <a:spLocks noChangeShapeType="1"/>
-          </p:cNvSpPr>
-          <p:nvPr/>
-        </p:nvSpPr>
-        <p:spPr bwMode="auto">
-          <a:xfrm>
-            <a:off x="1676400" y="152400"/>
-            <a:ext cx="8763000" cy="0"/>
-          </a:xfrm>
-          <a:prstGeom prst="line">
-            <a:avLst/>
-          </a:prstGeom>
-          <a:noFill/>
-          <a:ln w="76200">
-            <a:solidFill>
-              <a:schemeClr val="hlink"/>
-            </a:solidFill>
-            <a:round/>
-            <a:headEnd/>
-            <a:tailEnd/>
-          </a:ln>
-          <a:extLst>
-            <a:ext uri="{909E8E84-426E-40DD-AFC4-6F175D3DCCD1}">
-              <a14:hiddenFill xmlns:a14="http://schemas.microsoft.com/office/drawing/2010/main">
-                <a:noFill/>
-              </a14:hiddenFill>
-            </a:ext>
-          </a:extLst>
-        </p:spPr>
-        <p:txBody>
-          <a:bodyPr/>
-          <a:lstStyle/>
-          <a:p>
-            <a:endParaRPr lang="en-US"/>
-          </a:p>
-        </p:txBody>
-      </p:sp>
-      <p:sp>
-        <p:nvSpPr>
-          <p:cNvPr id="27650" name="Line 3"/>
-          <p:cNvSpPr>
-            <a:spLocks noChangeShapeType="1"/>
-          </p:cNvSpPr>
-          <p:nvPr/>
-        </p:nvSpPr>
-        <p:spPr bwMode="auto">
-          <a:xfrm>
-            <a:off x="1676400" y="990600"/>
-            <a:ext cx="8763000" cy="0"/>
-          </a:xfrm>
-          <a:prstGeom prst="line">
-            <a:avLst/>
-          </a:prstGeom>
-          <a:noFill/>
-          <a:ln w="19050">
-            <a:solidFill>
-              <a:schemeClr val="hlink"/>
-            </a:solidFill>
-            <a:round/>
-            <a:headEnd/>
-            <a:tailEnd/>
-          </a:ln>
-          <a:extLst>
-            <a:ext uri="{909E8E84-426E-40DD-AFC4-6F175D3DCCD1}">
-              <a14:hiddenFill xmlns:a14="http://schemas.microsoft.com/office/drawing/2010/main">
-                <a:noFill/>
-              </a14:hiddenFill>
-            </a:ext>
-          </a:extLst>
-        </p:spPr>
-        <p:txBody>
-          <a:bodyPr/>
-          <a:lstStyle/>
-          <a:p>
-            <a:endParaRPr lang="en-US"/>
-          </a:p>
-        </p:txBody>
-      </p:sp>
-      <p:sp>
-        <p:nvSpPr>
-          <p:cNvPr id="27651" name="Line 5"/>
-          <p:cNvSpPr>
-            <a:spLocks noChangeShapeType="1"/>
-          </p:cNvSpPr>
-          <p:nvPr/>
-        </p:nvSpPr>
-        <p:spPr bwMode="auto">
-          <a:xfrm>
-            <a:off x="1676400" y="6248400"/>
-            <a:ext cx="8763000" cy="0"/>
-          </a:xfrm>
-          <a:prstGeom prst="line">
-            <a:avLst/>
-          </a:prstGeom>
-          <a:noFill/>
-          <a:ln w="76200">
-            <a:solidFill>
-              <a:schemeClr val="hlink"/>
-            </a:solidFill>
-            <a:round/>
-            <a:headEnd/>
-            <a:tailEnd/>
-          </a:ln>
-          <a:extLst>
-            <a:ext uri="{909E8E84-426E-40DD-AFC4-6F175D3DCCD1}">
-              <a14:hiddenFill xmlns:a14="http://schemas.microsoft.com/office/drawing/2010/main">
-                <a:noFill/>
-              </a14:hiddenFill>
-            </a:ext>
-          </a:extLst>
-        </p:spPr>
-        <p:txBody>
-          <a:bodyPr/>
-          <a:lstStyle/>
-          <a:p>
-            <a:endParaRPr lang="en-US"/>
-          </a:p>
-        </p:txBody>
-      </p:sp>
       <p:pic>
         <p:nvPicPr>
           <p:cNvPr id="27652" name="Picture 6"/>
@@ -29046,10 +28269,15 @@
             <p:ph idx="1"/>
           </p:nvPr>
         </p:nvSpPr>
-        <p:spPr/>
+        <p:spPr>
+          <a:xfrm>
+            <a:off x="838200" y="1825625"/>
+            <a:ext cx="11049000" cy="4351338"/>
+          </a:xfrm>
+        </p:spPr>
         <p:txBody>
           <a:bodyPr>
-            <a:normAutofit fontScale="85000" lnSpcReduction="20000"/>
+            <a:normAutofit fontScale="92500" lnSpcReduction="20000"/>
           </a:bodyPr>
           <a:lstStyle/>
           <a:p>
@@ -29677,8 +28905,8 @@
         </p:nvSpPr>
         <p:spPr>
           <a:xfrm>
-            <a:off x="1676400" y="1600200"/>
-            <a:ext cx="7239000" cy="5791200"/>
+            <a:off x="675249" y="1600200"/>
+            <a:ext cx="10860259" cy="5791200"/>
           </a:xfrm>
           <a:extLst/>
         </p:spPr>
@@ -29952,7 +29180,7 @@
         </p:nvSpPr>
         <p:spPr>
           <a:xfrm>
-            <a:off x="1981200" y="609600"/>
+            <a:off x="890154" y="73026"/>
             <a:ext cx="6858000" cy="1320800"/>
           </a:xfrm>
         </p:spPr>
@@ -29961,7 +29189,7 @@
           <a:lstStyle/>
           <a:p>
             <a:r>
-              <a:rPr lang="en-US" altLang="en-US" smtClean="0"/>
+              <a:rPr lang="en-US" altLang="en-US" dirty="0" smtClean="0"/>
               <a:t>ALOHA Random Access Scheme</a:t>
             </a:r>
           </a:p>
@@ -29979,49 +29207,49 @@
         </p:nvSpPr>
         <p:spPr>
           <a:xfrm>
-            <a:off x="2008188" y="1393826"/>
-            <a:ext cx="7212012" cy="4930775"/>
+            <a:off x="748145" y="1393826"/>
+            <a:ext cx="10816937" cy="4930775"/>
           </a:xfrm>
         </p:spPr>
         <p:txBody>
           <a:bodyPr>
-            <a:normAutofit fontScale="85000" lnSpcReduction="20000"/>
+            <a:normAutofit lnSpcReduction="10000"/>
           </a:bodyPr>
           <a:lstStyle/>
           <a:p>
             <a:r>
-              <a:rPr lang="en-US" altLang="en-US" smtClean="0"/>
+              <a:rPr lang="en-US" altLang="en-US" dirty="0" smtClean="0"/>
               <a:t>It was developed at the University of Hawaii in the early 1970s to connect computers situated on different Hawaiian islands. The computers of the ALOHA network transmit on the same radio channel whenever they have a packet to transmit.</a:t>
             </a:r>
           </a:p>
           <a:p>
             <a:r>
-              <a:rPr lang="en-US" altLang="en-US" smtClean="0"/>
+              <a:rPr lang="en-US" altLang="en-US" dirty="0" smtClean="0"/>
               <a:t>From time-to-time packet transmission will collide, but these can be treated as transmission errors, and recovery can take place by retransmission. When traffic is very light, the probability of collision is very small, and so retransmissions need to be carried out infrequently.</a:t>
             </a:r>
           </a:p>
           <a:p>
             <a:r>
-              <a:rPr lang="en-US" altLang="en-US" smtClean="0"/>
+              <a:rPr lang="en-US" altLang="en-US" dirty="0" smtClean="0"/>
               <a:t>ALOHA scheme requires stations to use a </a:t>
             </a:r>
             <a:r>
-              <a:rPr lang="en-US" altLang="en-US" b="1" smtClean="0"/>
+              <a:rPr lang="en-US" altLang="en-US" b="1" dirty="0" smtClean="0"/>
               <a:t>random retransmission time.</a:t>
             </a:r>
             <a:r>
-              <a:rPr lang="en-US" altLang="en-US" smtClean="0"/>
+              <a:rPr lang="en-US" altLang="en-US" dirty="0" smtClean="0"/>
               <a:t> (This randomization is intended to spread out the retransmission and reduces the likelihood of additional collisions between stations. )</a:t>
             </a:r>
           </a:p>
           <a:p>
             <a:r>
-              <a:rPr lang="en-US" altLang="en-US" smtClean="0"/>
+              <a:rPr lang="en-US" altLang="en-US" dirty="0" smtClean="0"/>
               <a:t>ALOHA is the father of multiple access protocols. </a:t>
             </a:r>
           </a:p>
           <a:p>
-            <a:endParaRPr lang="en-US" altLang="en-US" smtClean="0"/>
+            <a:endParaRPr lang="en-US" altLang="en-US" dirty="0" smtClean="0"/>
           </a:p>
         </p:txBody>
       </p:sp>
@@ -30277,6 +29505,13 @@
   <p:clrMapOvr>
     <a:masterClrMapping/>
   </p:clrMapOvr>
+  <p:timing>
+    <p:tnLst>
+      <p:par>
+        <p:cTn id="1" dur="indefinite" restart="never" nodeType="tmRoot"/>
+      </p:par>
+    </p:tnLst>
+  </p:timing>
 </p:sld>
 </file>
 
